--- a/Slides/Ch2.1-Roscoe26.pptx
+++ b/Slides/Ch2.1-Roscoe26.pptx
@@ -6,40 +6,44 @@
     <p:sldMasterId id="2147483664" r:id="rId2"/>
   </p:sldMasterIdLst>
   <p:notesMasterIdLst>
-    <p:notesMasterId r:id="rId34"/>
+    <p:notesMasterId r:id="rId38"/>
   </p:notesMasterIdLst>
   <p:sldIdLst>
     <p:sldId id="436" r:id="rId3"/>
-    <p:sldId id="456" r:id="rId4"/>
-    <p:sldId id="747" r:id="rId5"/>
-    <p:sldId id="566" r:id="rId6"/>
-    <p:sldId id="459" r:id="rId7"/>
-    <p:sldId id="675" r:id="rId8"/>
-    <p:sldId id="748" r:id="rId9"/>
-    <p:sldId id="676" r:id="rId10"/>
-    <p:sldId id="677" r:id="rId11"/>
-    <p:sldId id="678" r:id="rId12"/>
-    <p:sldId id="728" r:id="rId13"/>
-    <p:sldId id="729" r:id="rId14"/>
-    <p:sldId id="731" r:id="rId15"/>
-    <p:sldId id="732" r:id="rId16"/>
-    <p:sldId id="733" r:id="rId17"/>
-    <p:sldId id="680" r:id="rId18"/>
-    <p:sldId id="681" r:id="rId19"/>
-    <p:sldId id="734" r:id="rId20"/>
-    <p:sldId id="682" r:id="rId21"/>
-    <p:sldId id="735" r:id="rId22"/>
-    <p:sldId id="736" r:id="rId23"/>
-    <p:sldId id="737" r:id="rId24"/>
-    <p:sldId id="738" r:id="rId25"/>
-    <p:sldId id="683" r:id="rId26"/>
-    <p:sldId id="739" r:id="rId27"/>
-    <p:sldId id="740" r:id="rId28"/>
-    <p:sldId id="742" r:id="rId29"/>
-    <p:sldId id="743" r:id="rId30"/>
-    <p:sldId id="744" r:id="rId31"/>
-    <p:sldId id="745" r:id="rId32"/>
-    <p:sldId id="746" r:id="rId33"/>
+    <p:sldId id="749" r:id="rId4"/>
+    <p:sldId id="456" r:id="rId5"/>
+    <p:sldId id="747" r:id="rId6"/>
+    <p:sldId id="566" r:id="rId7"/>
+    <p:sldId id="459" r:id="rId8"/>
+    <p:sldId id="675" r:id="rId9"/>
+    <p:sldId id="748" r:id="rId10"/>
+    <p:sldId id="676" r:id="rId11"/>
+    <p:sldId id="677" r:id="rId12"/>
+    <p:sldId id="678" r:id="rId13"/>
+    <p:sldId id="728" r:id="rId14"/>
+    <p:sldId id="729" r:id="rId15"/>
+    <p:sldId id="731" r:id="rId16"/>
+    <p:sldId id="732" r:id="rId17"/>
+    <p:sldId id="733" r:id="rId18"/>
+    <p:sldId id="680" r:id="rId19"/>
+    <p:sldId id="681" r:id="rId20"/>
+    <p:sldId id="734" r:id="rId21"/>
+    <p:sldId id="682" r:id="rId22"/>
+    <p:sldId id="735" r:id="rId23"/>
+    <p:sldId id="736" r:id="rId24"/>
+    <p:sldId id="737" r:id="rId25"/>
+    <p:sldId id="738" r:id="rId26"/>
+    <p:sldId id="683" r:id="rId27"/>
+    <p:sldId id="739" r:id="rId28"/>
+    <p:sldId id="740" r:id="rId29"/>
+    <p:sldId id="742" r:id="rId30"/>
+    <p:sldId id="743" r:id="rId31"/>
+    <p:sldId id="744" r:id="rId32"/>
+    <p:sldId id="745" r:id="rId33"/>
+    <p:sldId id="746" r:id="rId34"/>
+    <p:sldId id="751" r:id="rId35"/>
+    <p:sldId id="752" r:id="rId36"/>
+    <p:sldId id="750" r:id="rId37"/>
   </p:sldIdLst>
   <p:sldSz cx="12192000" cy="6858000"/>
   <p:notesSz cx="6858000" cy="9144000"/>
@@ -699,7 +703,7 @@
           <a:p>
             <a:fld id="{A532C98C-CB55-8B40-AF84-81E2BDD71A11}" type="slidenum">
               <a:rPr lang="en-US" smtClean="0"/>
-              <a:t>7</a:t>
+              <a:t>8</a:t>
             </a:fld>
             <a:endParaRPr lang="en-US"/>
           </a:p>
@@ -783,7 +787,7 @@
           <a:p>
             <a:fld id="{A532C98C-CB55-8B40-AF84-81E2BDD71A11}" type="slidenum">
               <a:rPr lang="en-US" smtClean="0"/>
-              <a:t>10</a:t>
+              <a:t>11</a:t>
             </a:fld>
             <a:endParaRPr lang="en-US"/>
           </a:p>
@@ -11443,6 +11447,327 @@
           <a:p>
             <a:r>
               <a:rPr lang="en-US" dirty="0"/>
+              <a:t>Example 2.1: Biased Sampling Method</a:t>
+            </a:r>
+          </a:p>
+        </p:txBody>
+      </p:sp>
+      <p:sp>
+        <p:nvSpPr>
+          <p:cNvPr id="3" name="Content Placeholder 2">
+            <a:extLst>
+              <a:ext uri="{FF2B5EF4-FFF2-40B4-BE49-F238E27FC236}">
+                <a16:creationId xmlns:a16="http://schemas.microsoft.com/office/drawing/2014/main" id="{F560478D-FD83-4675-BAAB-76846DAF7B63}"/>
+              </a:ext>
+            </a:extLst>
+          </p:cNvPr>
+          <p:cNvSpPr>
+            <a:spLocks noGrp="1"/>
+          </p:cNvSpPr>
+          <p:nvPr>
+            <p:ph sz="quarter" idx="12"/>
+          </p:nvPr>
+        </p:nvSpPr>
+        <p:spPr>
+          <a:prstGeom prst="rect">
+            <a:avLst/>
+          </a:prstGeom>
+        </p:spPr>
+        <p:txBody>
+          <a:bodyPr/>
+          <a:lstStyle/>
+          <a:p>
+            <a:pPr marL="292608" indent="-292608">
+              <a:buClr>
+                <a:schemeClr val="accent2"/>
+              </a:buClr>
+              <a:buFont typeface="Arial" panose="020B0604020202020204" pitchFamily="34" charset="0"/>
+              <a:buChar char="•"/>
+            </a:pPr>
+            <a:r>
+              <a:rPr lang="en-US" dirty="0"/>
+              <a:t>A sampling method is </a:t>
+            </a:r>
+            <a:r>
+              <a:rPr lang="en-US" b="1" dirty="0"/>
+              <a:t>biased</a:t>
+            </a:r>
+            <a:r>
+              <a:rPr lang="en-US" dirty="0"/>
+              <a:t> if statistics from samples consistently over or under-estimate the population parameter.</a:t>
+            </a:r>
+          </a:p>
+          <a:p>
+            <a:pPr marL="292608" indent="-292608">
+              <a:buClr>
+                <a:schemeClr val="accent2"/>
+              </a:buClr>
+              <a:buFont typeface="Arial" panose="020B0604020202020204" pitchFamily="34" charset="0"/>
+              <a:buChar char="•"/>
+            </a:pPr>
+            <a:r>
+              <a:rPr lang="en-US" dirty="0"/>
+              <a:t>Bias is a property of a sampling method, not the sample.</a:t>
+            </a:r>
+          </a:p>
+          <a:p>
+            <a:pPr marL="292608" indent="-292608">
+              <a:buClr>
+                <a:schemeClr val="accent2"/>
+              </a:buClr>
+              <a:buFont typeface="Arial" panose="020B0604020202020204" pitchFamily="34" charset="0"/>
+              <a:buChar char="•"/>
+            </a:pPr>
+            <a:r>
+              <a:rPr lang="en-US" dirty="0"/>
+              <a:t>A </a:t>
+            </a:r>
+            <a:r>
+              <a:rPr lang="en-US" i="1" dirty="0"/>
+              <a:t>method</a:t>
+            </a:r>
+            <a:r>
+              <a:rPr lang="en-US" dirty="0"/>
+              <a:t> must consistently produce non-representative results to be considered biased.</a:t>
+            </a:r>
+          </a:p>
+        </p:txBody>
+      </p:sp>
+    </p:spTree>
+    <p:extLst>
+      <p:ext uri="{BB962C8B-B14F-4D97-AF65-F5344CB8AC3E}">
+        <p14:creationId xmlns:p14="http://schemas.microsoft.com/office/powerpoint/2010/main" val="2412327701"/>
+      </p:ext>
+    </p:extLst>
+  </p:cSld>
+  <p:clrMapOvr>
+    <a:masterClrMapping/>
+  </p:clrMapOvr>
+  <p:timing>
+    <p:tnLst>
+      <p:par>
+        <p:cTn id="1" dur="indefinite" restart="never" nodeType="tmRoot">
+          <p:childTnLst>
+            <p:seq concurrent="1" nextAc="seek">
+              <p:cTn id="2" dur="indefinite" nodeType="mainSeq">
+                <p:childTnLst>
+                  <p:par>
+                    <p:cTn id="3" fill="hold">
+                      <p:stCondLst>
+                        <p:cond delay="indefinite"/>
+                      </p:stCondLst>
+                      <p:childTnLst>
+                        <p:par>
+                          <p:cTn id="4" fill="hold">
+                            <p:stCondLst>
+                              <p:cond delay="0"/>
+                            </p:stCondLst>
+                            <p:childTnLst>
+                              <p:par>
+                                <p:cTn id="5" presetID="1" presetClass="entr" presetSubtype="0" fill="hold" grpId="0" nodeType="clickEffect">
+                                  <p:stCondLst>
+                                    <p:cond delay="0"/>
+                                  </p:stCondLst>
+                                  <p:childTnLst>
+                                    <p:set>
+                                      <p:cBhvr>
+                                        <p:cTn id="6" dur="1" fill="hold">
+                                          <p:stCondLst>
+                                            <p:cond delay="0"/>
+                                          </p:stCondLst>
+                                        </p:cTn>
+                                        <p:tgtEl>
+                                          <p:spTgt spid="3">
+                                            <p:txEl>
+                                              <p:pRg st="0" end="0"/>
+                                            </p:txEl>
+                                          </p:spTgt>
+                                        </p:tgtEl>
+                                        <p:attrNameLst>
+                                          <p:attrName>style.visibility</p:attrName>
+                                        </p:attrNameLst>
+                                      </p:cBhvr>
+                                      <p:to>
+                                        <p:strVal val="visible"/>
+                                      </p:to>
+                                    </p:set>
+                                  </p:childTnLst>
+                                </p:cTn>
+                              </p:par>
+                            </p:childTnLst>
+                          </p:cTn>
+                        </p:par>
+                      </p:childTnLst>
+                    </p:cTn>
+                  </p:par>
+                  <p:par>
+                    <p:cTn id="7" fill="hold">
+                      <p:stCondLst>
+                        <p:cond delay="indefinite"/>
+                      </p:stCondLst>
+                      <p:childTnLst>
+                        <p:par>
+                          <p:cTn id="8" fill="hold">
+                            <p:stCondLst>
+                              <p:cond delay="0"/>
+                            </p:stCondLst>
+                            <p:childTnLst>
+                              <p:par>
+                                <p:cTn id="9" presetID="1" presetClass="entr" presetSubtype="0" fill="hold" grpId="0" nodeType="clickEffect">
+                                  <p:stCondLst>
+                                    <p:cond delay="0"/>
+                                  </p:stCondLst>
+                                  <p:childTnLst>
+                                    <p:set>
+                                      <p:cBhvr>
+                                        <p:cTn id="10" dur="1" fill="hold">
+                                          <p:stCondLst>
+                                            <p:cond delay="0"/>
+                                          </p:stCondLst>
+                                        </p:cTn>
+                                        <p:tgtEl>
+                                          <p:spTgt spid="3">
+                                            <p:txEl>
+                                              <p:pRg st="1" end="1"/>
+                                            </p:txEl>
+                                          </p:spTgt>
+                                        </p:tgtEl>
+                                        <p:attrNameLst>
+                                          <p:attrName>style.visibility</p:attrName>
+                                        </p:attrNameLst>
+                                      </p:cBhvr>
+                                      <p:to>
+                                        <p:strVal val="visible"/>
+                                      </p:to>
+                                    </p:set>
+                                  </p:childTnLst>
+                                </p:cTn>
+                              </p:par>
+                            </p:childTnLst>
+                          </p:cTn>
+                        </p:par>
+                      </p:childTnLst>
+                    </p:cTn>
+                  </p:par>
+                  <p:par>
+                    <p:cTn id="11" fill="hold">
+                      <p:stCondLst>
+                        <p:cond delay="indefinite"/>
+                      </p:stCondLst>
+                      <p:childTnLst>
+                        <p:par>
+                          <p:cTn id="12" fill="hold">
+                            <p:stCondLst>
+                              <p:cond delay="0"/>
+                            </p:stCondLst>
+                            <p:childTnLst>
+                              <p:par>
+                                <p:cTn id="13" presetID="1" presetClass="entr" presetSubtype="0" fill="hold" grpId="0" nodeType="clickEffect">
+                                  <p:stCondLst>
+                                    <p:cond delay="0"/>
+                                  </p:stCondLst>
+                                  <p:childTnLst>
+                                    <p:set>
+                                      <p:cBhvr>
+                                        <p:cTn id="14" dur="1" fill="hold">
+                                          <p:stCondLst>
+                                            <p:cond delay="0"/>
+                                          </p:stCondLst>
+                                        </p:cTn>
+                                        <p:tgtEl>
+                                          <p:spTgt spid="3">
+                                            <p:txEl>
+                                              <p:pRg st="2" end="2"/>
+                                            </p:txEl>
+                                          </p:spTgt>
+                                        </p:tgtEl>
+                                        <p:attrNameLst>
+                                          <p:attrName>style.visibility</p:attrName>
+                                        </p:attrNameLst>
+                                      </p:cBhvr>
+                                      <p:to>
+                                        <p:strVal val="visible"/>
+                                      </p:to>
+                                    </p:set>
+                                  </p:childTnLst>
+                                </p:cTn>
+                              </p:par>
+                            </p:childTnLst>
+                          </p:cTn>
+                        </p:par>
+                      </p:childTnLst>
+                    </p:cTn>
+                  </p:par>
+                </p:childTnLst>
+              </p:cTn>
+              <p:prevCondLst>
+                <p:cond evt="onPrev" delay="0">
+                  <p:tgtEl>
+                    <p:sldTgt/>
+                  </p:tgtEl>
+                </p:cond>
+              </p:prevCondLst>
+              <p:nextCondLst>
+                <p:cond evt="onNext" delay="0">
+                  <p:tgtEl>
+                    <p:sldTgt/>
+                  </p:tgtEl>
+                </p:cond>
+              </p:nextCondLst>
+            </p:seq>
+          </p:childTnLst>
+        </p:cTn>
+      </p:par>
+    </p:tnLst>
+    <p:bldLst>
+      <p:bldP spid="3" grpId="0" build="p"/>
+    </p:bldLst>
+  </p:timing>
+</p:sld>
+</file>
+
+<file path=ppt/slides/slide11.xml><?xml version="1.0" encoding="utf-8"?>
+<p:sld xmlns:a="http://schemas.openxmlformats.org/drawingml/2006/main" xmlns:r="http://schemas.openxmlformats.org/officeDocument/2006/relationships" xmlns:p="http://schemas.openxmlformats.org/presentationml/2006/main">
+  <p:cSld>
+    <p:spTree>
+      <p:nvGrpSpPr>
+        <p:cNvPr id="1" name=""/>
+        <p:cNvGrpSpPr/>
+        <p:nvPr/>
+      </p:nvGrpSpPr>
+      <p:grpSpPr>
+        <a:xfrm>
+          <a:off x="0" y="0"/>
+          <a:ext cx="0" cy="0"/>
+          <a:chOff x="0" y="0"/>
+          <a:chExt cx="0" cy="0"/>
+        </a:xfrm>
+      </p:grpSpPr>
+      <p:sp>
+        <p:nvSpPr>
+          <p:cNvPr id="2" name="Title 1">
+            <a:extLst>
+              <a:ext uri="{FF2B5EF4-FFF2-40B4-BE49-F238E27FC236}">
+                <a16:creationId xmlns:a16="http://schemas.microsoft.com/office/drawing/2014/main" id="{86A6687E-1398-4E2F-B2E5-752A4515DCAD}"/>
+              </a:ext>
+            </a:extLst>
+          </p:cNvPr>
+          <p:cNvSpPr>
+            <a:spLocks noGrp="1"/>
+          </p:cNvSpPr>
+          <p:nvPr>
+            <p:ph type="title"/>
+          </p:nvPr>
+        </p:nvSpPr>
+        <p:spPr/>
+        <p:txBody>
+          <a:bodyPr>
+            <a:normAutofit/>
+          </a:bodyPr>
+          <a:lstStyle/>
+          <a:p>
+            <a:r>
+              <a:rPr lang="en-US" dirty="0"/>
               <a:t>Example 2.1: Simple Random Sample</a:t>
             </a:r>
           </a:p>
@@ -11681,7 +12006,7 @@
 </p:sld>
 </file>
 
-<file path=ppt/slides/slide11.xml><?xml version="1.0" encoding="utf-8"?>
+<file path=ppt/slides/slide12.xml><?xml version="1.0" encoding="utf-8"?>
 <p:sld xmlns:a="http://schemas.openxmlformats.org/drawingml/2006/main" xmlns:r="http://schemas.openxmlformats.org/officeDocument/2006/relationships" xmlns:p="http://schemas.openxmlformats.org/presentationml/2006/main">
   <p:cSld>
     <p:spTree>
@@ -11990,140 +12315,6 @@
 </p:sld>
 </file>
 
-<file path=ppt/slides/slide12.xml><?xml version="1.0" encoding="utf-8"?>
-<p:sld xmlns:a="http://schemas.openxmlformats.org/drawingml/2006/main" xmlns:r="http://schemas.openxmlformats.org/officeDocument/2006/relationships" xmlns:p="http://schemas.openxmlformats.org/presentationml/2006/main">
-  <p:cSld>
-    <p:spTree>
-      <p:nvGrpSpPr>
-        <p:cNvPr id="1" name=""/>
-        <p:cNvGrpSpPr/>
-        <p:nvPr/>
-      </p:nvGrpSpPr>
-      <p:grpSpPr>
-        <a:xfrm>
-          <a:off x="0" y="0"/>
-          <a:ext cx="0" cy="0"/>
-          <a:chOff x="0" y="0"/>
-          <a:chExt cx="0" cy="0"/>
-        </a:xfrm>
-      </p:grpSpPr>
-      <p:sp>
-        <p:nvSpPr>
-          <p:cNvPr id="2" name="Title 1">
-            <a:extLst>
-              <a:ext uri="{FF2B5EF4-FFF2-40B4-BE49-F238E27FC236}">
-                <a16:creationId xmlns:a16="http://schemas.microsoft.com/office/drawing/2014/main" id="{86A6687E-1398-4E2F-B2E5-752A4515DCAD}"/>
-              </a:ext>
-            </a:extLst>
-          </p:cNvPr>
-          <p:cNvSpPr>
-            <a:spLocks noGrp="1"/>
-          </p:cNvSpPr>
-          <p:nvPr>
-            <p:ph type="title"/>
-          </p:nvPr>
-        </p:nvSpPr>
-        <p:spPr/>
-        <p:txBody>
-          <a:bodyPr>
-            <a:normAutofit/>
-          </a:bodyPr>
-          <a:lstStyle/>
-          <a:p>
-            <a:r>
-              <a:rPr lang="en-US" dirty="0"/>
-              <a:t>Example 2.1: General Social Survey</a:t>
-            </a:r>
-          </a:p>
-        </p:txBody>
-      </p:sp>
-      <p:sp>
-        <p:nvSpPr>
-          <p:cNvPr id="3" name="Content Placeholder 2">
-            <a:extLst>
-              <a:ext uri="{FF2B5EF4-FFF2-40B4-BE49-F238E27FC236}">
-                <a16:creationId xmlns:a16="http://schemas.microsoft.com/office/drawing/2014/main" id="{F560478D-FD83-4675-BAAB-76846DAF7B63}"/>
-              </a:ext>
-            </a:extLst>
-          </p:cNvPr>
-          <p:cNvSpPr>
-            <a:spLocks noGrp="1"/>
-          </p:cNvSpPr>
-          <p:nvPr>
-            <p:ph sz="quarter" idx="12"/>
-          </p:nvPr>
-        </p:nvSpPr>
-        <p:spPr/>
-        <p:txBody>
-          <a:bodyPr/>
-          <a:lstStyle/>
-          <a:p>
-            <a:pPr marL="292608" indent="-292608">
-              <a:buClr>
-                <a:schemeClr val="accent2"/>
-              </a:buClr>
-              <a:buFont typeface="Arial" panose="020B0604020202020204" pitchFamily="34" charset="0"/>
-              <a:buChar char="•"/>
-            </a:pPr>
-            <a:r>
-              <a:rPr lang="en-US" dirty="0"/>
-              <a:t>Does the General Social Survey use a simple random sample?</a:t>
-            </a:r>
-          </a:p>
-          <a:p>
-            <a:pPr marL="292608" indent="-292608">
-              <a:buClr>
-                <a:schemeClr val="accent2"/>
-              </a:buClr>
-              <a:buFont typeface="Arial" panose="020B0604020202020204" pitchFamily="34" charset="0"/>
-              <a:buChar char="•"/>
-            </a:pPr>
-            <a:r>
-              <a:rPr lang="en-US" dirty="0"/>
-              <a:t>It is unlikely that the GSS has a complete sampling frame, such as a list of all adults in the United States.</a:t>
-            </a:r>
-          </a:p>
-          <a:p>
-            <a:pPr marL="292608" indent="-292608">
-              <a:buClr>
-                <a:schemeClr val="accent2"/>
-              </a:buClr>
-              <a:buFont typeface="Arial" panose="020B0604020202020204" pitchFamily="34" charset="0"/>
-              <a:buChar char="•"/>
-            </a:pPr>
-            <a:r>
-              <a:rPr lang="en-US" dirty="0"/>
-              <a:t>However, the GSS uses a method that tries to ensure that each U.S. adults has the same probability of being chosen as every other U.S. adult and thus makes the sample representative of the population.</a:t>
-            </a:r>
-          </a:p>
-          <a:p>
-            <a:pPr marL="292608" indent="-292608">
-              <a:buClr>
-                <a:schemeClr val="accent2"/>
-              </a:buClr>
-              <a:buFont typeface="Arial" panose="020B0604020202020204" pitchFamily="34" charset="0"/>
-              <a:buChar char="•"/>
-            </a:pPr>
-            <a:r>
-              <a:rPr lang="en-US" dirty="0"/>
-              <a:t>Why are the GSS results so different from the actual results? Was it just by random chance?</a:t>
-            </a:r>
-          </a:p>
-        </p:txBody>
-      </p:sp>
-    </p:spTree>
-    <p:extLst>
-      <p:ext uri="{BB962C8B-B14F-4D97-AF65-F5344CB8AC3E}">
-        <p14:creationId xmlns:p14="http://schemas.microsoft.com/office/powerpoint/2010/main" val="1966278997"/>
-      </p:ext>
-    </p:extLst>
-  </p:cSld>
-  <p:clrMapOvr>
-    <a:masterClrMapping/>
-  </p:clrMapOvr>
-</p:sld>
-</file>
-
 <file path=ppt/slides/slide13.xml><?xml version="1.0" encoding="utf-8"?>
 <p:sld xmlns:a="http://schemas.openxmlformats.org/drawingml/2006/main" xmlns:r="http://schemas.openxmlformats.org/officeDocument/2006/relationships" xmlns:p="http://schemas.openxmlformats.org/presentationml/2006/main">
   <p:cSld>
@@ -12166,13 +12357,8 @@
           <a:p>
             <a:r>
               <a:rPr lang="en-US" dirty="0"/>
-              <a:t>Example 2.1: Sampling Students </a:t>
-            </a:r>
-            <a:r>
-              <a:rPr lang="en-US" sz="2000" b="0" dirty="0"/>
-              <a:t>(1 of 13)</a:t>
-            </a:r>
-            <a:endParaRPr lang="en-US" sz="4800" dirty="0"/>
+              <a:t>Example 2.1: General Social Survey</a:t>
+            </a:r>
           </a:p>
         </p:txBody>
       </p:sp>
@@ -12206,6 +12392,145 @@
             </a:pPr>
             <a:r>
               <a:rPr lang="en-US" dirty="0"/>
+              <a:t>Does the General Social Survey use a simple random sample?</a:t>
+            </a:r>
+          </a:p>
+          <a:p>
+            <a:pPr marL="292608" indent="-292608">
+              <a:buClr>
+                <a:schemeClr val="accent2"/>
+              </a:buClr>
+              <a:buFont typeface="Arial" panose="020B0604020202020204" pitchFamily="34" charset="0"/>
+              <a:buChar char="•"/>
+            </a:pPr>
+            <a:r>
+              <a:rPr lang="en-US" dirty="0"/>
+              <a:t>It is unlikely that the GSS has a complete sampling frame, such as a list of all adults in the United States.</a:t>
+            </a:r>
+          </a:p>
+          <a:p>
+            <a:pPr marL="292608" indent="-292608">
+              <a:buClr>
+                <a:schemeClr val="accent2"/>
+              </a:buClr>
+              <a:buFont typeface="Arial" panose="020B0604020202020204" pitchFamily="34" charset="0"/>
+              <a:buChar char="•"/>
+            </a:pPr>
+            <a:r>
+              <a:rPr lang="en-US" dirty="0"/>
+              <a:t>However, the GSS uses a method that tries to ensure that each U.S. adults has the same probability of being chosen as every other U.S. adult and thus makes the sample representative of the population.</a:t>
+            </a:r>
+          </a:p>
+          <a:p>
+            <a:pPr marL="292608" indent="-292608">
+              <a:buClr>
+                <a:schemeClr val="accent2"/>
+              </a:buClr>
+              <a:buFont typeface="Arial" panose="020B0604020202020204" pitchFamily="34" charset="0"/>
+              <a:buChar char="•"/>
+            </a:pPr>
+            <a:r>
+              <a:rPr lang="en-US" dirty="0"/>
+              <a:t>Why are the GSS results so different from the actual results? Was it just by random chance?</a:t>
+            </a:r>
+          </a:p>
+        </p:txBody>
+      </p:sp>
+    </p:spTree>
+    <p:extLst>
+      <p:ext uri="{BB962C8B-B14F-4D97-AF65-F5344CB8AC3E}">
+        <p14:creationId xmlns:p14="http://schemas.microsoft.com/office/powerpoint/2010/main" val="1966278997"/>
+      </p:ext>
+    </p:extLst>
+  </p:cSld>
+  <p:clrMapOvr>
+    <a:masterClrMapping/>
+  </p:clrMapOvr>
+</p:sld>
+</file>
+
+<file path=ppt/slides/slide14.xml><?xml version="1.0" encoding="utf-8"?>
+<p:sld xmlns:a="http://schemas.openxmlformats.org/drawingml/2006/main" xmlns:r="http://schemas.openxmlformats.org/officeDocument/2006/relationships" xmlns:p="http://schemas.openxmlformats.org/presentationml/2006/main">
+  <p:cSld>
+    <p:spTree>
+      <p:nvGrpSpPr>
+        <p:cNvPr id="1" name=""/>
+        <p:cNvGrpSpPr/>
+        <p:nvPr/>
+      </p:nvGrpSpPr>
+      <p:grpSpPr>
+        <a:xfrm>
+          <a:off x="0" y="0"/>
+          <a:ext cx="0" cy="0"/>
+          <a:chOff x="0" y="0"/>
+          <a:chExt cx="0" cy="0"/>
+        </a:xfrm>
+      </p:grpSpPr>
+      <p:sp>
+        <p:nvSpPr>
+          <p:cNvPr id="2" name="Title 1">
+            <a:extLst>
+              <a:ext uri="{FF2B5EF4-FFF2-40B4-BE49-F238E27FC236}">
+                <a16:creationId xmlns:a16="http://schemas.microsoft.com/office/drawing/2014/main" id="{86A6687E-1398-4E2F-B2E5-752A4515DCAD}"/>
+              </a:ext>
+            </a:extLst>
+          </p:cNvPr>
+          <p:cNvSpPr>
+            <a:spLocks noGrp="1"/>
+          </p:cNvSpPr>
+          <p:nvPr>
+            <p:ph type="title"/>
+          </p:nvPr>
+        </p:nvSpPr>
+        <p:spPr/>
+        <p:txBody>
+          <a:bodyPr>
+            <a:normAutofit/>
+          </a:bodyPr>
+          <a:lstStyle/>
+          <a:p>
+            <a:r>
+              <a:rPr lang="en-US" dirty="0"/>
+              <a:t>Example 2.1: Sampling Students </a:t>
+            </a:r>
+            <a:r>
+              <a:rPr lang="en-US" sz="2000" b="0" dirty="0"/>
+              <a:t>(1 of 13)</a:t>
+            </a:r>
+            <a:endParaRPr lang="en-US" sz="4800" dirty="0"/>
+          </a:p>
+        </p:txBody>
+      </p:sp>
+      <p:sp>
+        <p:nvSpPr>
+          <p:cNvPr id="3" name="Content Placeholder 2">
+            <a:extLst>
+              <a:ext uri="{FF2B5EF4-FFF2-40B4-BE49-F238E27FC236}">
+                <a16:creationId xmlns:a16="http://schemas.microsoft.com/office/drawing/2014/main" id="{F560478D-FD83-4675-BAAB-76846DAF7B63}"/>
+              </a:ext>
+            </a:extLst>
+          </p:cNvPr>
+          <p:cNvSpPr>
+            <a:spLocks noGrp="1"/>
+          </p:cNvSpPr>
+          <p:nvPr>
+            <p:ph sz="quarter" idx="12"/>
+          </p:nvPr>
+        </p:nvSpPr>
+        <p:spPr/>
+        <p:txBody>
+          <a:bodyPr/>
+          <a:lstStyle/>
+          <a:p>
+            <a:pPr marL="292608" indent="-292608">
+              <a:buClr>
+                <a:schemeClr val="accent2"/>
+              </a:buClr>
+              <a:buFont typeface="Arial" panose="020B0604020202020204" pitchFamily="34" charset="0"/>
+              <a:buChar char="•"/>
+            </a:pPr>
+            <a:r>
+              <a:rPr lang="en-US" dirty="0"/>
               <a:t>To explore a whether the difference between a sample proportion and a population proportion is due to random chance, we need to explore distributions of sample proportions where we have access to the entire population.</a:t>
             </a:r>
           </a:p>
@@ -12263,7 +12588,7 @@
 </p:sld>
 </file>
 
-<file path=ppt/slides/slide14.xml><?xml version="1.0" encoding="utf-8"?>
+<file path=ppt/slides/slide15.xml><?xml version="1.0" encoding="utf-8"?>
 <p:sld xmlns:a="http://schemas.openxmlformats.org/drawingml/2006/main" xmlns:r="http://schemas.openxmlformats.org/officeDocument/2006/relationships" xmlns:p="http://schemas.openxmlformats.org/presentationml/2006/main">
   <p:cSld>
     <p:spTree>
@@ -12579,7 +12904,7 @@
 </p:sld>
 </file>
 
-<file path=ppt/slides/slide15.xml><?xml version="1.0" encoding="utf-8"?>
+<file path=ppt/slides/slide16.xml><?xml version="1.0" encoding="utf-8"?>
 <p:sld xmlns:a="http://schemas.openxmlformats.org/drawingml/2006/main" xmlns:r="http://schemas.openxmlformats.org/officeDocument/2006/relationships" xmlns:p="http://schemas.openxmlformats.org/presentationml/2006/main">
   <p:cSld>
     <p:spTree>
@@ -12895,7 +13220,7 @@
 </p:sld>
 </file>
 
-<file path=ppt/slides/slide16.xml><?xml version="1.0" encoding="utf-8"?>
+<file path=ppt/slides/slide17.xml><?xml version="1.0" encoding="utf-8"?>
 <p:sld xmlns:a="http://schemas.openxmlformats.org/drawingml/2006/main" xmlns:r="http://schemas.openxmlformats.org/officeDocument/2006/relationships" xmlns:p="http://schemas.openxmlformats.org/presentationml/2006/main">
   <p:cSld>
     <p:spTree>
@@ -17903,7 +18228,7 @@
 </p:sld>
 </file>
 
-<file path=ppt/slides/slide17.xml><?xml version="1.0" encoding="utf-8"?>
+<file path=ppt/slides/slide18.xml><?xml version="1.0" encoding="utf-8"?>
 <p:sld xmlns:a="http://schemas.openxmlformats.org/drawingml/2006/main" xmlns:r="http://schemas.openxmlformats.org/officeDocument/2006/relationships" xmlns:p="http://schemas.openxmlformats.org/presentationml/2006/main">
   <p:cSld>
     <p:spTree>
@@ -18865,7 +19190,7 @@
 </p:sld>
 </file>
 
-<file path=ppt/slides/slide18.xml><?xml version="1.0" encoding="utf-8"?>
+<file path=ppt/slides/slide19.xml><?xml version="1.0" encoding="utf-8"?>
 <p:sld xmlns:a="http://schemas.openxmlformats.org/drawingml/2006/main" xmlns:r="http://schemas.openxmlformats.org/officeDocument/2006/relationships" xmlns:p="http://schemas.openxmlformats.org/presentationml/2006/main">
   <p:cSld>
     <p:spTree>
@@ -19332,7 +19657,136 @@
 </p:sld>
 </file>
 
-<file path=ppt/slides/slide19.xml><?xml version="1.0" encoding="utf-8"?>
+<file path=ppt/slides/slide2.xml><?xml version="1.0" encoding="utf-8"?>
+<p:sld xmlns:a="http://schemas.openxmlformats.org/drawingml/2006/main" xmlns:r="http://schemas.openxmlformats.org/officeDocument/2006/relationships" xmlns:p="http://schemas.openxmlformats.org/presentationml/2006/main">
+  <p:cSld>
+    <p:spTree>
+      <p:nvGrpSpPr>
+        <p:cNvPr id="1" name=""/>
+        <p:cNvGrpSpPr/>
+        <p:nvPr/>
+      </p:nvGrpSpPr>
+      <p:grpSpPr>
+        <a:xfrm>
+          <a:off x="0" y="0"/>
+          <a:ext cx="0" cy="0"/>
+          <a:chOff x="0" y="0"/>
+          <a:chExt cx="0" cy="0"/>
+        </a:xfrm>
+      </p:grpSpPr>
+      <p:sp>
+        <p:nvSpPr>
+          <p:cNvPr id="2" name="Title 1">
+            <a:extLst>
+              <a:ext uri="{FF2B5EF4-FFF2-40B4-BE49-F238E27FC236}">
+                <a16:creationId xmlns:a16="http://schemas.microsoft.com/office/drawing/2014/main" id="{86DF9D2E-53CF-2363-749D-4A38B2586833}"/>
+              </a:ext>
+            </a:extLst>
+          </p:cNvPr>
+          <p:cNvSpPr>
+            <a:spLocks noGrp="1"/>
+          </p:cNvSpPr>
+          <p:nvPr>
+            <p:ph type="title"/>
+          </p:nvPr>
+        </p:nvSpPr>
+        <p:spPr/>
+        <p:txBody>
+          <a:bodyPr/>
+          <a:lstStyle/>
+          <a:p>
+            <a:r>
+              <a:rPr lang="en-US" dirty="0"/>
+              <a:t>Warm-Up #1</a:t>
+            </a:r>
+          </a:p>
+        </p:txBody>
+      </p:sp>
+      <p:sp>
+        <p:nvSpPr>
+          <p:cNvPr id="3" name="Footer Placeholder 2">
+            <a:extLst>
+              <a:ext uri="{FF2B5EF4-FFF2-40B4-BE49-F238E27FC236}">
+                <a16:creationId xmlns:a16="http://schemas.microsoft.com/office/drawing/2014/main" id="{ADDA9625-A7DE-8361-BA81-C7881ACC80D4}"/>
+              </a:ext>
+            </a:extLst>
+          </p:cNvPr>
+          <p:cNvSpPr>
+            <a:spLocks noGrp="1"/>
+          </p:cNvSpPr>
+          <p:nvPr>
+            <p:ph type="ftr" sz="quarter" idx="11"/>
+          </p:nvPr>
+        </p:nvSpPr>
+        <p:spPr/>
+        <p:txBody>
+          <a:bodyPr/>
+          <a:lstStyle/>
+          <a:p>
+            <a:r>
+              <a:rPr lang="en-US"/>
+              <a:t>Copyright ©2020 John Wiley &amp; Sons, Inc. </a:t>
+            </a:r>
+            <a:endParaRPr lang="en-US" dirty="0"/>
+          </a:p>
+        </p:txBody>
+      </p:sp>
+      <p:sp>
+        <p:nvSpPr>
+          <p:cNvPr id="4" name="Content Placeholder 3">
+            <a:extLst>
+              <a:ext uri="{FF2B5EF4-FFF2-40B4-BE49-F238E27FC236}">
+                <a16:creationId xmlns:a16="http://schemas.microsoft.com/office/drawing/2014/main" id="{E0F33147-0343-9D2E-0145-07634BCF3EAF}"/>
+              </a:ext>
+            </a:extLst>
+          </p:cNvPr>
+          <p:cNvSpPr>
+            <a:spLocks noGrp="1"/>
+          </p:cNvSpPr>
+          <p:nvPr>
+            <p:ph sz="quarter" idx="12"/>
+          </p:nvPr>
+        </p:nvSpPr>
+        <p:spPr/>
+        <p:txBody>
+          <a:bodyPr/>
+          <a:lstStyle/>
+          <a:p>
+            <a:r>
+              <a:rPr lang="en-US" dirty="0"/>
+              <a:t>For the hot-dog-is-a-sandwich study, discuss with your neighbor:</a:t>
+            </a:r>
+          </a:p>
+          <a:p>
+            <a:pPr lvl="1"/>
+            <a:r>
+              <a:rPr lang="en-US" dirty="0"/>
+              <a:t>What are the observational units?</a:t>
+            </a:r>
+          </a:p>
+          <a:p>
+            <a:pPr lvl="1"/>
+            <a:r>
+              <a:rPr lang="en-US" dirty="0"/>
+              <a:t>What is the variable(s)?</a:t>
+            </a:r>
+          </a:p>
+        </p:txBody>
+      </p:sp>
+    </p:spTree>
+    <p:extLst>
+      <p:ext uri="{BB962C8B-B14F-4D97-AF65-F5344CB8AC3E}">
+        <p14:creationId xmlns:p14="http://schemas.microsoft.com/office/powerpoint/2010/main" val="2516742508"/>
+      </p:ext>
+    </p:extLst>
+  </p:cSld>
+  <p:clrMapOvr>
+    <a:masterClrMapping/>
+  </p:clrMapOvr>
+</p:sld>
+</file>
+
+<file path=ppt/slides/slide20.xml><?xml version="1.0" encoding="utf-8"?>
 <p:sld xmlns:a="http://schemas.openxmlformats.org/drawingml/2006/main" xmlns:r="http://schemas.openxmlformats.org/officeDocument/2006/relationships" xmlns:p="http://schemas.openxmlformats.org/presentationml/2006/main">
   <p:cSld>
     <p:spTree>
@@ -19717,271 +20171,7 @@
 </p:sld>
 </file>
 
-<file path=ppt/slides/slide2.xml><?xml version="1.0" encoding="utf-8"?>
-<p:sld xmlns:a="http://schemas.openxmlformats.org/drawingml/2006/main" xmlns:r="http://schemas.openxmlformats.org/officeDocument/2006/relationships" xmlns:p="http://schemas.openxmlformats.org/presentationml/2006/main">
-  <p:cSld>
-    <p:spTree>
-      <p:nvGrpSpPr>
-        <p:cNvPr id="1" name=""/>
-        <p:cNvGrpSpPr/>
-        <p:nvPr/>
-      </p:nvGrpSpPr>
-      <p:grpSpPr>
-        <a:xfrm>
-          <a:off x="0" y="0"/>
-          <a:ext cx="0" cy="0"/>
-          <a:chOff x="0" y="0"/>
-          <a:chExt cx="0" cy="0"/>
-        </a:xfrm>
-      </p:grpSpPr>
-      <p:sp>
-        <p:nvSpPr>
-          <p:cNvPr id="2" name="Title 1">
-            <a:extLst>
-              <a:ext uri="{FF2B5EF4-FFF2-40B4-BE49-F238E27FC236}">
-                <a16:creationId xmlns:a16="http://schemas.microsoft.com/office/drawing/2014/main" id="{3CA5C44F-93DD-4509-9DFA-473064D254B0}"/>
-              </a:ext>
-            </a:extLst>
-          </p:cNvPr>
-          <p:cNvSpPr>
-            <a:spLocks noGrp="1"/>
-          </p:cNvSpPr>
-          <p:nvPr>
-            <p:ph type="title"/>
-          </p:nvPr>
-        </p:nvSpPr>
-        <p:spPr/>
-        <p:txBody>
-          <a:bodyPr/>
-          <a:lstStyle/>
-          <a:p>
-            <a:r>
-              <a:rPr lang="en-US" dirty="0"/>
-              <a:t>Statistic and Parameter</a:t>
-            </a:r>
-          </a:p>
-        </p:txBody>
-      </p:sp>
-      <p:sp>
-        <p:nvSpPr>
-          <p:cNvPr id="3" name="Content Placeholder 2">
-            <a:extLst>
-              <a:ext uri="{FF2B5EF4-FFF2-40B4-BE49-F238E27FC236}">
-                <a16:creationId xmlns:a16="http://schemas.microsoft.com/office/drawing/2014/main" id="{F13A70D3-C5BB-4A0B-AC57-23EAD601927A}"/>
-              </a:ext>
-            </a:extLst>
-          </p:cNvPr>
-          <p:cNvSpPr>
-            <a:spLocks noGrp="1"/>
-          </p:cNvSpPr>
-          <p:nvPr>
-            <p:ph sz="quarter" idx="16"/>
-          </p:nvPr>
-        </p:nvSpPr>
-        <p:spPr>
-          <a:xfrm>
-            <a:off x="1828800" y="1752600"/>
-            <a:ext cx="8534400" cy="1979980"/>
-          </a:xfrm>
-          <a:prstGeom prst="rect">
-            <a:avLst/>
-          </a:prstGeom>
-        </p:spPr>
-        <p:txBody>
-          <a:bodyPr/>
-          <a:lstStyle/>
-          <a:p>
-            <a:pPr marL="292608" indent="-292608">
-              <a:lnSpc>
-                <a:spcPct val="100000"/>
-              </a:lnSpc>
-              <a:buClr>
-                <a:schemeClr val="accent2"/>
-              </a:buClr>
-              <a:buFont typeface="Arial" panose="020B0604020202020204" pitchFamily="34" charset="0"/>
-              <a:buChar char="•"/>
-            </a:pPr>
-            <a:r>
-              <a:rPr lang="en-US" sz="2400" dirty="0">
-                <a:latin typeface="Times New Roman" pitchFamily="18" charset="0"/>
-                <a:cs typeface="Times New Roman" panose="02020603050405020304" pitchFamily="18" charset="0"/>
-              </a:rPr>
-              <a:t>So far in our study of tests of significance we’ve focused on </a:t>
-            </a:r>
-            <a:r>
-              <a:rPr lang="en-US" sz="2400" i="1" dirty="0">
-                <a:latin typeface="Times New Roman" pitchFamily="18" charset="0"/>
-                <a:cs typeface="Times New Roman" panose="02020603050405020304" pitchFamily="18" charset="0"/>
-              </a:rPr>
-              <a:t>process</a:t>
-            </a:r>
-            <a:r>
-              <a:rPr lang="en-US" sz="2400" dirty="0">
-                <a:latin typeface="Times New Roman" pitchFamily="18" charset="0"/>
-                <a:cs typeface="Times New Roman" panose="02020603050405020304" pitchFamily="18" charset="0"/>
-              </a:rPr>
-              <a:t> probabilities.</a:t>
-            </a:r>
-          </a:p>
-          <a:p>
-            <a:pPr marL="621792" lvl="1" indent="-320040">
-              <a:lnSpc>
-                <a:spcPct val="100000"/>
-              </a:lnSpc>
-              <a:buClr>
-                <a:schemeClr val="accent2"/>
-              </a:buClr>
-              <a:buSzPct val="80000"/>
-              <a:buFont typeface="Courier New" panose="02070309020205020404" pitchFamily="49" charset="0"/>
-              <a:buChar char="o"/>
-            </a:pPr>
-            <a:r>
-              <a:rPr lang="en-US" dirty="0">
-                <a:latin typeface="Times New Roman" panose="02020603050405020304" pitchFamily="18" charset="0"/>
-                <a:cs typeface="Times New Roman" panose="02020603050405020304" pitchFamily="18" charset="0"/>
-              </a:rPr>
-              <a:t>Is the probability that Buzz will push the correct button more than 0.5?</a:t>
-            </a:r>
-          </a:p>
-          <a:p>
-            <a:pPr marL="621792" lvl="1" indent="-320040">
-              <a:lnSpc>
-                <a:spcPct val="100000"/>
-              </a:lnSpc>
-              <a:buClr>
-                <a:schemeClr val="accent2"/>
-              </a:buClr>
-              <a:buSzPct val="80000"/>
-              <a:buFont typeface="Courier New" panose="02070309020205020404" pitchFamily="49" charset="0"/>
-              <a:buChar char="o"/>
-            </a:pPr>
-            <a:r>
-              <a:rPr lang="en-US" dirty="0">
-                <a:latin typeface="Times New Roman" panose="02020603050405020304" pitchFamily="18" charset="0"/>
-                <a:cs typeface="Times New Roman" panose="02020603050405020304" pitchFamily="18" charset="0"/>
-              </a:rPr>
-              <a:t>Is the probability that scissors will be thrown less than</a:t>
-            </a:r>
-          </a:p>
-          <a:p>
-            <a:pPr marL="621792" lvl="1" indent="-320040">
-              <a:lnSpc>
-                <a:spcPct val="100000"/>
-              </a:lnSpc>
-              <a:buClr>
-                <a:schemeClr val="accent2"/>
-              </a:buClr>
-              <a:buSzPct val="80000"/>
-              <a:buFont typeface="Courier New" panose="02070309020205020404" pitchFamily="49" charset="0"/>
-              <a:buChar char="o"/>
-            </a:pPr>
-            <a:r>
-              <a:rPr lang="en-US" dirty="0">
-                <a:latin typeface="Times New Roman" panose="02020603050405020304" pitchFamily="18" charset="0"/>
-                <a:cs typeface="Times New Roman" panose="02020603050405020304" pitchFamily="18" charset="0"/>
-              </a:rPr>
-              <a:t>Is it likely that less than 50% of the class will think a hot dog is a sandwich?</a:t>
-            </a:r>
-          </a:p>
-        </p:txBody>
-      </p:sp>
-      <p:graphicFrame>
-        <p:nvGraphicFramePr>
-          <p:cNvPr id="8" name="Object 7" descr="1 over 3?"/>
-          <p:cNvGraphicFramePr>
-            <a:graphicFrameLocks noGrp="1" noChangeAspect="1"/>
-          </p:cNvGraphicFramePr>
-          <p:nvPr/>
-        </p:nvGraphicFramePr>
-        <p:xfrm>
-          <a:off x="9314586" y="3292234"/>
-          <a:ext cx="306388" cy="592137"/>
-        </p:xfrm>
-        <a:graphic>
-          <a:graphicData uri="http://schemas.openxmlformats.org/presentationml/2006/ole">
-            <mc:AlternateContent xmlns:mc="http://schemas.openxmlformats.org/markup-compatibility/2006">
-              <mc:Choice xmlns:v="urn:schemas-microsoft-com:vml" Requires="v">
-                <p:oleObj name="Equation" r:id="rId2" imgW="380880" imgH="736560" progId="Equation.DSMT4">
-                  <p:embed/>
-                </p:oleObj>
-              </mc:Choice>
-              <mc:Fallback>
-                <p:oleObj name="Equation" r:id="rId2" imgW="380880" imgH="736560" progId="Equation.DSMT4">
-                  <p:embed/>
-                  <p:pic>
-                    <p:nvPicPr>
-                      <p:cNvPr id="8" name="Object 7" descr="1 over 3?"/>
-                      <p:cNvPicPr>
-                        <a:picLocks noGrp="1" noChangeAspect="1" noChangeArrowheads="1"/>
-                      </p:cNvPicPr>
-                      <p:nvPr/>
-                    </p:nvPicPr>
-                    <p:blipFill>
-                      <a:blip r:embed="rId3">
-                        <a:extLst>
-                          <a:ext uri="{28A0092B-C50C-407E-A947-70E740481C1C}">
-                            <a14:useLocalDpi xmlns:a14="http://schemas.microsoft.com/office/drawing/2010/main" val="0"/>
-                          </a:ext>
-                        </a:extLst>
-                      </a:blip>
-                      <a:srcRect/>
-                      <a:stretch>
-                        <a:fillRect/>
-                      </a:stretch>
-                    </p:blipFill>
-                    <p:spPr bwMode="auto">
-                      <a:xfrm>
-                        <a:off x="9314586" y="3292234"/>
-                        <a:ext cx="306388" cy="592137"/>
-                      </a:xfrm>
-                      <a:prstGeom prst="rect">
-                        <a:avLst/>
-                      </a:prstGeom>
-                      <a:noFill/>
-                      <a:ln>
-                        <a:noFill/>
-                      </a:ln>
-                      <a:extLst>
-                        <a:ext uri="{909E8E84-426E-40DD-AFC4-6F175D3DCCD1}">
-                          <a14:hiddenFill xmlns:a14="http://schemas.microsoft.com/office/drawing/2010/main">
-                            <a:solidFill>
-                              <a:srgbClr val="FFFFFF"/>
-                            </a:solidFill>
-                          </a14:hiddenFill>
-                        </a:ext>
-                        <a:ext uri="{91240B29-F687-4F45-9708-019B960494DF}">
-                          <a14:hiddenLine xmlns:a14="http://schemas.microsoft.com/office/drawing/2010/main" w="9525">
-                            <a:solidFill>
-                              <a:srgbClr val="000000"/>
-                            </a:solidFill>
-                            <a:miter lim="800000"/>
-                            <a:headEnd/>
-                            <a:tailEnd/>
-                          </a14:hiddenLine>
-                        </a:ext>
-                      </a:extLst>
-                    </p:spPr>
-                  </p:pic>
-                </p:oleObj>
-              </mc:Fallback>
-            </mc:AlternateContent>
-          </a:graphicData>
-        </a:graphic>
-      </p:graphicFrame>
-    </p:spTree>
-    <p:extLst>
-      <p:ext uri="{BB962C8B-B14F-4D97-AF65-F5344CB8AC3E}">
-        <p14:creationId xmlns:p14="http://schemas.microsoft.com/office/powerpoint/2010/main" val="2916175408"/>
-      </p:ext>
-    </p:extLst>
-  </p:cSld>
-  <p:clrMapOvr>
-    <a:masterClrMapping/>
-  </p:clrMapOvr>
-</p:sld>
-</file>
-
-<file path=ppt/slides/slide20.xml><?xml version="1.0" encoding="utf-8"?>
+<file path=ppt/slides/slide21.xml><?xml version="1.0" encoding="utf-8"?>
 <p:sld xmlns:a="http://schemas.openxmlformats.org/drawingml/2006/main" xmlns:r="http://schemas.openxmlformats.org/officeDocument/2006/relationships" xmlns:p="http://schemas.openxmlformats.org/presentationml/2006/main">
   <p:cSld>
     <p:spTree>
@@ -20109,7 +20299,7 @@
 </p:sld>
 </file>
 
-<file path=ppt/slides/slide21.xml><?xml version="1.0" encoding="utf-8"?>
+<file path=ppt/slides/slide22.xml><?xml version="1.0" encoding="utf-8"?>
 <p:sld xmlns:a="http://schemas.openxmlformats.org/drawingml/2006/main" xmlns:r="http://schemas.openxmlformats.org/officeDocument/2006/relationships" xmlns:p="http://schemas.openxmlformats.org/presentationml/2006/main">
   <p:cSld>
     <p:spTree>
@@ -20354,7 +20544,7 @@
 </p:sld>
 </file>
 
-<file path=ppt/slides/slide22.xml><?xml version="1.0" encoding="utf-8"?>
+<file path=ppt/slides/slide23.xml><?xml version="1.0" encoding="utf-8"?>
 <p:sld xmlns:a="http://schemas.openxmlformats.org/drawingml/2006/main" xmlns:r="http://schemas.openxmlformats.org/officeDocument/2006/relationships" xmlns:p="http://schemas.openxmlformats.org/presentationml/2006/main">
   <p:cSld>
     <p:spTree>
@@ -20645,7 +20835,7 @@
 </p:sld>
 </file>
 
-<file path=ppt/slides/slide23.xml><?xml version="1.0" encoding="utf-8"?>
+<file path=ppt/slides/slide24.xml><?xml version="1.0" encoding="utf-8"?>
 <p:sld xmlns:a="http://schemas.openxmlformats.org/drawingml/2006/main" xmlns:r="http://schemas.openxmlformats.org/officeDocument/2006/relationships" xmlns:p="http://schemas.openxmlformats.org/presentationml/2006/main">
   <p:cSld>
     <p:spTree>
@@ -20913,7 +21103,7 @@
 </p:sld>
 </file>
 
-<file path=ppt/slides/slide24.xml><?xml version="1.0" encoding="utf-8"?>
+<file path=ppt/slides/slide25.xml><?xml version="1.0" encoding="utf-8"?>
 <p:sld xmlns:a="http://schemas.openxmlformats.org/drawingml/2006/main" xmlns:r="http://schemas.openxmlformats.org/officeDocument/2006/relationships" xmlns:p="http://schemas.openxmlformats.org/presentationml/2006/main">
   <p:cSld>
     <p:spTree>
@@ -21230,7 +21420,7 @@
 </p:sld>
 </file>
 
-<file path=ppt/slides/slide25.xml><?xml version="1.0" encoding="utf-8"?>
+<file path=ppt/slides/slide26.xml><?xml version="1.0" encoding="utf-8"?>
 <p:sld xmlns:a="http://schemas.openxmlformats.org/drawingml/2006/main" xmlns:r="http://schemas.openxmlformats.org/officeDocument/2006/relationships" xmlns:p="http://schemas.openxmlformats.org/presentationml/2006/main">
   <p:cSld>
     <p:spTree>
@@ -21533,7 +21723,7 @@
 </p:sld>
 </file>
 
-<file path=ppt/slides/slide26.xml><?xml version="1.0" encoding="utf-8"?>
+<file path=ppt/slides/slide27.xml><?xml version="1.0" encoding="utf-8"?>
 <p:sld xmlns:a="http://schemas.openxmlformats.org/drawingml/2006/main" xmlns:r="http://schemas.openxmlformats.org/officeDocument/2006/relationships" xmlns:p="http://schemas.openxmlformats.org/presentationml/2006/main">
   <p:cSld>
     <p:spTree>
@@ -21640,7 +21830,7 @@
 </p:sld>
 </file>
 
-<file path=ppt/slides/slide27.xml><?xml version="1.0" encoding="utf-8"?>
+<file path=ppt/slides/slide28.xml><?xml version="1.0" encoding="utf-8"?>
 <p:sld xmlns:a="http://schemas.openxmlformats.org/drawingml/2006/main" xmlns:r="http://schemas.openxmlformats.org/officeDocument/2006/relationships" xmlns:p="http://schemas.openxmlformats.org/presentationml/2006/main">
   <p:cSld>
     <p:spTree>
@@ -21908,7 +22098,7 @@
 </p:sld>
 </file>
 
-<file path=ppt/slides/slide28.xml><?xml version="1.0" encoding="utf-8"?>
+<file path=ppt/slides/slide29.xml><?xml version="1.0" encoding="utf-8"?>
 <p:sld xmlns:a="http://schemas.openxmlformats.org/drawingml/2006/main" xmlns:r="http://schemas.openxmlformats.org/officeDocument/2006/relationships" xmlns:p="http://schemas.openxmlformats.org/presentationml/2006/main">
   <p:cSld>
     <p:spTree>
@@ -22242,118 +22432,6 @@
 </p:sld>
 </file>
 
-<file path=ppt/slides/slide29.xml><?xml version="1.0" encoding="utf-8"?>
-<p:sld xmlns:a="http://schemas.openxmlformats.org/drawingml/2006/main" xmlns:r="http://schemas.openxmlformats.org/officeDocument/2006/relationships" xmlns:p="http://schemas.openxmlformats.org/presentationml/2006/main">
-  <p:cSld>
-    <p:spTree>
-      <p:nvGrpSpPr>
-        <p:cNvPr id="1" name=""/>
-        <p:cNvGrpSpPr/>
-        <p:nvPr/>
-      </p:nvGrpSpPr>
-      <p:grpSpPr>
-        <a:xfrm>
-          <a:off x="0" y="0"/>
-          <a:ext cx="0" cy="0"/>
-          <a:chOff x="0" y="0"/>
-          <a:chExt cx="0" cy="0"/>
-        </a:xfrm>
-      </p:grpSpPr>
-      <p:sp>
-        <p:nvSpPr>
-          <p:cNvPr id="2" name="Title 1">
-            <a:extLst>
-              <a:ext uri="{FF2B5EF4-FFF2-40B4-BE49-F238E27FC236}">
-                <a16:creationId xmlns:a16="http://schemas.microsoft.com/office/drawing/2014/main" id="{86A6687E-1398-4E2F-B2E5-752A4515DCAD}"/>
-              </a:ext>
-            </a:extLst>
-          </p:cNvPr>
-          <p:cNvSpPr>
-            <a:spLocks noGrp="1"/>
-          </p:cNvSpPr>
-          <p:nvPr>
-            <p:ph type="title"/>
-          </p:nvPr>
-        </p:nvSpPr>
-        <p:spPr/>
-        <p:txBody>
-          <a:bodyPr>
-            <a:normAutofit/>
-          </a:bodyPr>
-          <a:lstStyle/>
-          <a:p>
-            <a:r>
-              <a:rPr lang="en-US" dirty="0"/>
-              <a:t>Example 2.1: Strong Evidence</a:t>
-            </a:r>
-          </a:p>
-        </p:txBody>
-      </p:sp>
-      <p:sp>
-        <p:nvSpPr>
-          <p:cNvPr id="3" name="Content Placeholder 2">
-            <a:extLst>
-              <a:ext uri="{FF2B5EF4-FFF2-40B4-BE49-F238E27FC236}">
-                <a16:creationId xmlns:a16="http://schemas.microsoft.com/office/drawing/2014/main" id="{F560478D-FD83-4675-BAAB-76846DAF7B63}"/>
-              </a:ext>
-            </a:extLst>
-          </p:cNvPr>
-          <p:cNvSpPr>
-            <a:spLocks noGrp="1"/>
-          </p:cNvSpPr>
-          <p:nvPr>
-            <p:ph sz="quarter" idx="12"/>
-          </p:nvPr>
-        </p:nvSpPr>
-        <p:spPr>
-          <a:prstGeom prst="rect">
-            <a:avLst/>
-          </a:prstGeom>
-        </p:spPr>
-        <p:txBody>
-          <a:bodyPr/>
-          <a:lstStyle/>
-          <a:p>
-            <a:pPr marL="292608" indent="-292608">
-              <a:buClr>
-                <a:schemeClr val="accent2"/>
-              </a:buClr>
-              <a:buFont typeface="Arial" panose="020B0604020202020204" pitchFamily="34" charset="0"/>
-              <a:buChar char="•"/>
-            </a:pPr>
-            <a:r>
-              <a:rPr lang="en-US" dirty="0"/>
-              <a:t>With a standardized statistic of 10.10, we have very strong evidence that this difference did not arise from random chance alone.</a:t>
-            </a:r>
-          </a:p>
-          <a:p>
-            <a:pPr marL="292608" indent="-292608">
-              <a:buClr>
-                <a:schemeClr val="accent2"/>
-              </a:buClr>
-              <a:buFont typeface="Arial" panose="020B0604020202020204" pitchFamily="34" charset="0"/>
-              <a:buChar char="•"/>
-            </a:pPr>
-            <a:r>
-              <a:rPr lang="en-US" dirty="0"/>
-              <a:t>What could be another explanation for this difference between sample proportion of voters and population proportion of voters?</a:t>
-            </a:r>
-          </a:p>
-        </p:txBody>
-      </p:sp>
-    </p:spTree>
-    <p:extLst>
-      <p:ext uri="{BB962C8B-B14F-4D97-AF65-F5344CB8AC3E}">
-        <p14:creationId xmlns:p14="http://schemas.microsoft.com/office/powerpoint/2010/main" val="3858639024"/>
-      </p:ext>
-    </p:extLst>
-  </p:cSld>
-  <p:clrMapOvr>
-    <a:masterClrMapping/>
-  </p:clrMapOvr>
-</p:sld>
-</file>
-
 <file path=ppt/slides/slide3.xml><?xml version="1.0" encoding="utf-8"?>
 <p:sld xmlns:a="http://schemas.openxmlformats.org/drawingml/2006/main" xmlns:r="http://schemas.openxmlformats.org/officeDocument/2006/relationships" xmlns:p="http://schemas.openxmlformats.org/presentationml/2006/main">
   <p:cSld>
@@ -22373,6 +22451,1336 @@
       </p:grpSpPr>
       <p:sp>
         <p:nvSpPr>
+          <p:cNvPr id="2" name="Title 1">
+            <a:extLst>
+              <a:ext uri="{FF2B5EF4-FFF2-40B4-BE49-F238E27FC236}">
+                <a16:creationId xmlns:a16="http://schemas.microsoft.com/office/drawing/2014/main" id="{3CA5C44F-93DD-4509-9DFA-473064D254B0}"/>
+              </a:ext>
+            </a:extLst>
+          </p:cNvPr>
+          <p:cNvSpPr>
+            <a:spLocks noGrp="1"/>
+          </p:cNvSpPr>
+          <p:nvPr>
+            <p:ph type="title"/>
+          </p:nvPr>
+        </p:nvSpPr>
+        <p:spPr/>
+        <p:txBody>
+          <a:bodyPr/>
+          <a:lstStyle/>
+          <a:p>
+            <a:r>
+              <a:rPr lang="en-US" dirty="0"/>
+              <a:t>Statistic and Parameter</a:t>
+            </a:r>
+          </a:p>
+        </p:txBody>
+      </p:sp>
+      <p:sp>
+        <p:nvSpPr>
+          <p:cNvPr id="3" name="Content Placeholder 2">
+            <a:extLst>
+              <a:ext uri="{FF2B5EF4-FFF2-40B4-BE49-F238E27FC236}">
+                <a16:creationId xmlns:a16="http://schemas.microsoft.com/office/drawing/2014/main" id="{F13A70D3-C5BB-4A0B-AC57-23EAD601927A}"/>
+              </a:ext>
+            </a:extLst>
+          </p:cNvPr>
+          <p:cNvSpPr>
+            <a:spLocks noGrp="1"/>
+          </p:cNvSpPr>
+          <p:nvPr>
+            <p:ph sz="quarter" idx="16"/>
+          </p:nvPr>
+        </p:nvSpPr>
+        <p:spPr>
+          <a:xfrm>
+            <a:off x="1828800" y="1752600"/>
+            <a:ext cx="8534400" cy="1979980"/>
+          </a:xfrm>
+          <a:prstGeom prst="rect">
+            <a:avLst/>
+          </a:prstGeom>
+        </p:spPr>
+        <p:txBody>
+          <a:bodyPr/>
+          <a:lstStyle/>
+          <a:p>
+            <a:pPr marL="292608" indent="-292608">
+              <a:lnSpc>
+                <a:spcPct val="100000"/>
+              </a:lnSpc>
+              <a:buClr>
+                <a:schemeClr val="accent2"/>
+              </a:buClr>
+              <a:buFont typeface="Arial" panose="020B0604020202020204" pitchFamily="34" charset="0"/>
+              <a:buChar char="•"/>
+            </a:pPr>
+            <a:r>
+              <a:rPr lang="en-US" sz="2400" dirty="0">
+                <a:latin typeface="Times New Roman" pitchFamily="18" charset="0"/>
+                <a:cs typeface="Times New Roman" panose="02020603050405020304" pitchFamily="18" charset="0"/>
+              </a:rPr>
+              <a:t>So far in our study of tests of significance we’ve focused on </a:t>
+            </a:r>
+            <a:r>
+              <a:rPr lang="en-US" sz="2400" i="1" dirty="0">
+                <a:latin typeface="Times New Roman" pitchFamily="18" charset="0"/>
+                <a:cs typeface="Times New Roman" panose="02020603050405020304" pitchFamily="18" charset="0"/>
+              </a:rPr>
+              <a:t>process</a:t>
+            </a:r>
+            <a:r>
+              <a:rPr lang="en-US" sz="2400" dirty="0">
+                <a:latin typeface="Times New Roman" pitchFamily="18" charset="0"/>
+                <a:cs typeface="Times New Roman" panose="02020603050405020304" pitchFamily="18" charset="0"/>
+              </a:rPr>
+              <a:t> probabilities.</a:t>
+            </a:r>
+          </a:p>
+          <a:p>
+            <a:pPr marL="621792" lvl="1" indent="-320040">
+              <a:lnSpc>
+                <a:spcPct val="100000"/>
+              </a:lnSpc>
+              <a:buClr>
+                <a:schemeClr val="accent2"/>
+              </a:buClr>
+              <a:buSzPct val="80000"/>
+              <a:buFont typeface="Courier New" panose="02070309020205020404" pitchFamily="49" charset="0"/>
+              <a:buChar char="o"/>
+            </a:pPr>
+            <a:r>
+              <a:rPr lang="en-US" dirty="0">
+                <a:latin typeface="Times New Roman" panose="02020603050405020304" pitchFamily="18" charset="0"/>
+                <a:cs typeface="Times New Roman" panose="02020603050405020304" pitchFamily="18" charset="0"/>
+              </a:rPr>
+              <a:t>Is the probability that Buzz will push the correct button more than 0.5?</a:t>
+            </a:r>
+          </a:p>
+          <a:p>
+            <a:pPr marL="621792" lvl="1" indent="-320040">
+              <a:lnSpc>
+                <a:spcPct val="100000"/>
+              </a:lnSpc>
+              <a:buClr>
+                <a:schemeClr val="accent2"/>
+              </a:buClr>
+              <a:buSzPct val="80000"/>
+              <a:buFont typeface="Courier New" panose="02070309020205020404" pitchFamily="49" charset="0"/>
+              <a:buChar char="o"/>
+            </a:pPr>
+            <a:r>
+              <a:rPr lang="en-US" dirty="0">
+                <a:latin typeface="Times New Roman" panose="02020603050405020304" pitchFamily="18" charset="0"/>
+                <a:cs typeface="Times New Roman" panose="02020603050405020304" pitchFamily="18" charset="0"/>
+              </a:rPr>
+              <a:t>Is the probability that scissors will be thrown less than</a:t>
+            </a:r>
+          </a:p>
+          <a:p>
+            <a:pPr marL="621792" lvl="1" indent="-320040">
+              <a:lnSpc>
+                <a:spcPct val="100000"/>
+              </a:lnSpc>
+              <a:buClr>
+                <a:schemeClr val="accent2"/>
+              </a:buClr>
+              <a:buSzPct val="80000"/>
+              <a:buFont typeface="Courier New" panose="02070309020205020404" pitchFamily="49" charset="0"/>
+              <a:buChar char="o"/>
+            </a:pPr>
+            <a:r>
+              <a:rPr lang="en-US" dirty="0">
+                <a:latin typeface="Times New Roman" panose="02020603050405020304" pitchFamily="18" charset="0"/>
+                <a:cs typeface="Times New Roman" panose="02020603050405020304" pitchFamily="18" charset="0"/>
+              </a:rPr>
+              <a:t>Is it likely that less than 50% of the class will think a hot dog is a sandwich?</a:t>
+            </a:r>
+          </a:p>
+        </p:txBody>
+      </p:sp>
+      <p:graphicFrame>
+        <p:nvGraphicFramePr>
+          <p:cNvPr id="8" name="Object 7" descr="1 over 3?"/>
+          <p:cNvGraphicFramePr>
+            <a:graphicFrameLocks noGrp="1" noChangeAspect="1"/>
+          </p:cNvGraphicFramePr>
+          <p:nvPr/>
+        </p:nvGraphicFramePr>
+        <p:xfrm>
+          <a:off x="9314586" y="3292234"/>
+          <a:ext cx="306388" cy="592137"/>
+        </p:xfrm>
+        <a:graphic>
+          <a:graphicData uri="http://schemas.openxmlformats.org/presentationml/2006/ole">
+            <mc:AlternateContent xmlns:mc="http://schemas.openxmlformats.org/markup-compatibility/2006">
+              <mc:Choice xmlns:v="urn:schemas-microsoft-com:vml" Requires="v">
+                <p:oleObj name="Equation" r:id="rId2" imgW="380880" imgH="736560" progId="Equation.DSMT4">
+                  <p:embed/>
+                </p:oleObj>
+              </mc:Choice>
+              <mc:Fallback>
+                <p:oleObj name="Equation" r:id="rId2" imgW="380880" imgH="736560" progId="Equation.DSMT4">
+                  <p:embed/>
+                  <p:pic>
+                    <p:nvPicPr>
+                      <p:cNvPr id="8" name="Object 7" descr="1 over 3?"/>
+                      <p:cNvPicPr>
+                        <a:picLocks noGrp="1" noChangeAspect="1" noChangeArrowheads="1"/>
+                      </p:cNvPicPr>
+                      <p:nvPr/>
+                    </p:nvPicPr>
+                    <p:blipFill>
+                      <a:blip r:embed="rId3">
+                        <a:extLst>
+                          <a:ext uri="{28A0092B-C50C-407E-A947-70E740481C1C}">
+                            <a14:useLocalDpi xmlns:a14="http://schemas.microsoft.com/office/drawing/2010/main" val="0"/>
+                          </a:ext>
+                        </a:extLst>
+                      </a:blip>
+                      <a:srcRect/>
+                      <a:stretch>
+                        <a:fillRect/>
+                      </a:stretch>
+                    </p:blipFill>
+                    <p:spPr bwMode="auto">
+                      <a:xfrm>
+                        <a:off x="9314586" y="3292234"/>
+                        <a:ext cx="306388" cy="592137"/>
+                      </a:xfrm>
+                      <a:prstGeom prst="rect">
+                        <a:avLst/>
+                      </a:prstGeom>
+                      <a:noFill/>
+                      <a:ln>
+                        <a:noFill/>
+                      </a:ln>
+                      <a:extLst>
+                        <a:ext uri="{909E8E84-426E-40DD-AFC4-6F175D3DCCD1}">
+                          <a14:hiddenFill xmlns:a14="http://schemas.microsoft.com/office/drawing/2010/main">
+                            <a:solidFill>
+                              <a:srgbClr val="FFFFFF"/>
+                            </a:solidFill>
+                          </a14:hiddenFill>
+                        </a:ext>
+                        <a:ext uri="{91240B29-F687-4F45-9708-019B960494DF}">
+                          <a14:hiddenLine xmlns:a14="http://schemas.microsoft.com/office/drawing/2010/main" w="9525">
+                            <a:solidFill>
+                              <a:srgbClr val="000000"/>
+                            </a:solidFill>
+                            <a:miter lim="800000"/>
+                            <a:headEnd/>
+                            <a:tailEnd/>
+                          </a14:hiddenLine>
+                        </a:ext>
+                      </a:extLst>
+                    </p:spPr>
+                  </p:pic>
+                </p:oleObj>
+              </mc:Fallback>
+            </mc:AlternateContent>
+          </a:graphicData>
+        </a:graphic>
+      </p:graphicFrame>
+    </p:spTree>
+    <p:extLst>
+      <p:ext uri="{BB962C8B-B14F-4D97-AF65-F5344CB8AC3E}">
+        <p14:creationId xmlns:p14="http://schemas.microsoft.com/office/powerpoint/2010/main" val="2916175408"/>
+      </p:ext>
+    </p:extLst>
+  </p:cSld>
+  <p:clrMapOvr>
+    <a:masterClrMapping/>
+  </p:clrMapOvr>
+</p:sld>
+</file>
+
+<file path=ppt/slides/slide30.xml><?xml version="1.0" encoding="utf-8"?>
+<p:sld xmlns:a="http://schemas.openxmlformats.org/drawingml/2006/main" xmlns:r="http://schemas.openxmlformats.org/officeDocument/2006/relationships" xmlns:p="http://schemas.openxmlformats.org/presentationml/2006/main">
+  <p:cSld>
+    <p:spTree>
+      <p:nvGrpSpPr>
+        <p:cNvPr id="1" name=""/>
+        <p:cNvGrpSpPr/>
+        <p:nvPr/>
+      </p:nvGrpSpPr>
+      <p:grpSpPr>
+        <a:xfrm>
+          <a:off x="0" y="0"/>
+          <a:ext cx="0" cy="0"/>
+          <a:chOff x="0" y="0"/>
+          <a:chExt cx="0" cy="0"/>
+        </a:xfrm>
+      </p:grpSpPr>
+      <p:sp>
+        <p:nvSpPr>
+          <p:cNvPr id="2" name="Title 1">
+            <a:extLst>
+              <a:ext uri="{FF2B5EF4-FFF2-40B4-BE49-F238E27FC236}">
+                <a16:creationId xmlns:a16="http://schemas.microsoft.com/office/drawing/2014/main" id="{86A6687E-1398-4E2F-B2E5-752A4515DCAD}"/>
+              </a:ext>
+            </a:extLst>
+          </p:cNvPr>
+          <p:cNvSpPr>
+            <a:spLocks noGrp="1"/>
+          </p:cNvSpPr>
+          <p:nvPr>
+            <p:ph type="title"/>
+          </p:nvPr>
+        </p:nvSpPr>
+        <p:spPr/>
+        <p:txBody>
+          <a:bodyPr>
+            <a:normAutofit/>
+          </a:bodyPr>
+          <a:lstStyle/>
+          <a:p>
+            <a:r>
+              <a:rPr lang="en-US" dirty="0"/>
+              <a:t>Example 2.1: Strong Evidence</a:t>
+            </a:r>
+          </a:p>
+        </p:txBody>
+      </p:sp>
+      <p:sp>
+        <p:nvSpPr>
+          <p:cNvPr id="3" name="Content Placeholder 2">
+            <a:extLst>
+              <a:ext uri="{FF2B5EF4-FFF2-40B4-BE49-F238E27FC236}">
+                <a16:creationId xmlns:a16="http://schemas.microsoft.com/office/drawing/2014/main" id="{F560478D-FD83-4675-BAAB-76846DAF7B63}"/>
+              </a:ext>
+            </a:extLst>
+          </p:cNvPr>
+          <p:cNvSpPr>
+            <a:spLocks noGrp="1"/>
+          </p:cNvSpPr>
+          <p:nvPr>
+            <p:ph sz="quarter" idx="12"/>
+          </p:nvPr>
+        </p:nvSpPr>
+        <p:spPr>
+          <a:prstGeom prst="rect">
+            <a:avLst/>
+          </a:prstGeom>
+        </p:spPr>
+        <p:txBody>
+          <a:bodyPr/>
+          <a:lstStyle/>
+          <a:p>
+            <a:pPr marL="292608" indent="-292608">
+              <a:buClr>
+                <a:schemeClr val="accent2"/>
+              </a:buClr>
+              <a:buFont typeface="Arial" panose="020B0604020202020204" pitchFamily="34" charset="0"/>
+              <a:buChar char="•"/>
+            </a:pPr>
+            <a:r>
+              <a:rPr lang="en-US" dirty="0"/>
+              <a:t>With a standardized statistic of 10.10, we have very strong evidence that this difference did not arise from random chance alone.</a:t>
+            </a:r>
+          </a:p>
+          <a:p>
+            <a:pPr marL="292608" indent="-292608">
+              <a:buClr>
+                <a:schemeClr val="accent2"/>
+              </a:buClr>
+              <a:buFont typeface="Arial" panose="020B0604020202020204" pitchFamily="34" charset="0"/>
+              <a:buChar char="•"/>
+            </a:pPr>
+            <a:r>
+              <a:rPr lang="en-US" dirty="0"/>
+              <a:t>What could be another explanation for this difference between sample proportion of voters and population proportion of voters?</a:t>
+            </a:r>
+          </a:p>
+        </p:txBody>
+      </p:sp>
+    </p:spTree>
+    <p:extLst>
+      <p:ext uri="{BB962C8B-B14F-4D97-AF65-F5344CB8AC3E}">
+        <p14:creationId xmlns:p14="http://schemas.microsoft.com/office/powerpoint/2010/main" val="3858639024"/>
+      </p:ext>
+    </p:extLst>
+  </p:cSld>
+  <p:clrMapOvr>
+    <a:masterClrMapping/>
+  </p:clrMapOvr>
+</p:sld>
+</file>
+
+<file path=ppt/slides/slide31.xml><?xml version="1.0" encoding="utf-8"?>
+<p:sld xmlns:a="http://schemas.openxmlformats.org/drawingml/2006/main" xmlns:r="http://schemas.openxmlformats.org/officeDocument/2006/relationships" xmlns:p="http://schemas.openxmlformats.org/presentationml/2006/main">
+  <p:cSld>
+    <p:spTree>
+      <p:nvGrpSpPr>
+        <p:cNvPr id="1" name=""/>
+        <p:cNvGrpSpPr/>
+        <p:nvPr/>
+      </p:nvGrpSpPr>
+      <p:grpSpPr>
+        <a:xfrm>
+          <a:off x="0" y="0"/>
+          <a:ext cx="0" cy="0"/>
+          <a:chOff x="0" y="0"/>
+          <a:chExt cx="0" cy="0"/>
+        </a:xfrm>
+      </p:grpSpPr>
+      <p:sp>
+        <p:nvSpPr>
+          <p:cNvPr id="2" name="Title 1">
+            <a:extLst>
+              <a:ext uri="{FF2B5EF4-FFF2-40B4-BE49-F238E27FC236}">
+                <a16:creationId xmlns:a16="http://schemas.microsoft.com/office/drawing/2014/main" id="{86A6687E-1398-4E2F-B2E5-752A4515DCAD}"/>
+              </a:ext>
+            </a:extLst>
+          </p:cNvPr>
+          <p:cNvSpPr>
+            <a:spLocks noGrp="1"/>
+          </p:cNvSpPr>
+          <p:nvPr>
+            <p:ph type="title"/>
+          </p:nvPr>
+        </p:nvSpPr>
+        <p:spPr/>
+        <p:txBody>
+          <a:bodyPr>
+            <a:normAutofit/>
+          </a:bodyPr>
+          <a:lstStyle/>
+          <a:p>
+            <a:r>
+              <a:rPr lang="en-US" dirty="0"/>
+              <a:t>Example 2.1: </a:t>
+            </a:r>
+            <a:r>
+              <a:rPr lang="en-US" dirty="0" err="1"/>
+              <a:t>Nonsampling</a:t>
+            </a:r>
+            <a:r>
+              <a:rPr lang="en-US" dirty="0"/>
+              <a:t> Concerns </a:t>
+            </a:r>
+            <a:r>
+              <a:rPr lang="en-US" sz="2000" b="0" dirty="0"/>
+              <a:t>(1 of 2)</a:t>
+            </a:r>
+            <a:endParaRPr lang="en-US" dirty="0"/>
+          </a:p>
+        </p:txBody>
+      </p:sp>
+      <p:sp>
+        <p:nvSpPr>
+          <p:cNvPr id="3" name="Content Placeholder 2">
+            <a:extLst>
+              <a:ext uri="{FF2B5EF4-FFF2-40B4-BE49-F238E27FC236}">
+                <a16:creationId xmlns:a16="http://schemas.microsoft.com/office/drawing/2014/main" id="{F560478D-FD83-4675-BAAB-76846DAF7B63}"/>
+              </a:ext>
+            </a:extLst>
+          </p:cNvPr>
+          <p:cNvSpPr>
+            <a:spLocks noGrp="1"/>
+          </p:cNvSpPr>
+          <p:nvPr>
+            <p:ph sz="quarter" idx="12"/>
+          </p:nvPr>
+        </p:nvSpPr>
+        <p:spPr>
+          <a:prstGeom prst="rect">
+            <a:avLst/>
+          </a:prstGeom>
+        </p:spPr>
+        <p:txBody>
+          <a:bodyPr/>
+          <a:lstStyle/>
+          <a:p>
+            <a:pPr marL="292608" indent="-292608">
+              <a:buClr>
+                <a:schemeClr val="accent2"/>
+              </a:buClr>
+              <a:buFont typeface="Arial" panose="020B0604020202020204" pitchFamily="34" charset="0"/>
+              <a:buChar char="•"/>
+            </a:pPr>
+            <a:r>
+              <a:rPr lang="en-US" dirty="0"/>
+              <a:t>When a question is posed to someone in a poll that has a </a:t>
+            </a:r>
+            <a:r>
+              <a:rPr lang="en-US" i="1" dirty="0"/>
+              <a:t>socially desirable </a:t>
+            </a:r>
+            <a:r>
+              <a:rPr lang="en-US" dirty="0"/>
+              <a:t>response (like you voted), individuals will sometimes overestimate or incorrectly recall their past behavior.</a:t>
+            </a:r>
+          </a:p>
+          <a:p>
+            <a:pPr marL="292608" indent="-292608">
+              <a:buClr>
+                <a:schemeClr val="accent2"/>
+              </a:buClr>
+              <a:buFont typeface="Arial" panose="020B0604020202020204" pitchFamily="34" charset="0"/>
+              <a:buChar char="•"/>
+            </a:pPr>
+            <a:r>
+              <a:rPr lang="en-US" dirty="0"/>
+              <a:t>In this case, we have reason to believe that the difference between 0.698 and 0.592 is not due to a badly collected sample (a “sampling concern”) or due to random chance, but rather due to individuals not being honest in their responses.</a:t>
+            </a:r>
+          </a:p>
+          <a:p>
+            <a:pPr marL="292608" indent="-292608">
+              <a:buClr>
+                <a:schemeClr val="accent2"/>
+              </a:buClr>
+              <a:buFont typeface="Arial" panose="020B0604020202020204" pitchFamily="34" charset="0"/>
+              <a:buChar char="•"/>
+            </a:pPr>
+            <a:r>
+              <a:rPr lang="en-US" dirty="0"/>
+              <a:t>This is a type of </a:t>
+            </a:r>
+            <a:r>
+              <a:rPr lang="en-US" b="1" dirty="0" err="1"/>
+              <a:t>nonsampling</a:t>
+            </a:r>
+            <a:r>
+              <a:rPr lang="en-US" b="1" dirty="0"/>
+              <a:t> concern</a:t>
+            </a:r>
+            <a:r>
+              <a:rPr lang="en-US" dirty="0"/>
+              <a:t>.</a:t>
+            </a:r>
+          </a:p>
+        </p:txBody>
+      </p:sp>
+    </p:spTree>
+    <p:extLst>
+      <p:ext uri="{BB962C8B-B14F-4D97-AF65-F5344CB8AC3E}">
+        <p14:creationId xmlns:p14="http://schemas.microsoft.com/office/powerpoint/2010/main" val="2875002151"/>
+      </p:ext>
+    </p:extLst>
+  </p:cSld>
+  <p:clrMapOvr>
+    <a:masterClrMapping/>
+  </p:clrMapOvr>
+</p:sld>
+</file>
+
+<file path=ppt/slides/slide32.xml><?xml version="1.0" encoding="utf-8"?>
+<p:sld xmlns:a="http://schemas.openxmlformats.org/drawingml/2006/main" xmlns:r="http://schemas.openxmlformats.org/officeDocument/2006/relationships" xmlns:p="http://schemas.openxmlformats.org/presentationml/2006/main">
+  <p:cSld>
+    <p:spTree>
+      <p:nvGrpSpPr>
+        <p:cNvPr id="1" name=""/>
+        <p:cNvGrpSpPr/>
+        <p:nvPr/>
+      </p:nvGrpSpPr>
+      <p:grpSpPr>
+        <a:xfrm>
+          <a:off x="0" y="0"/>
+          <a:ext cx="0" cy="0"/>
+          <a:chOff x="0" y="0"/>
+          <a:chExt cx="0" cy="0"/>
+        </a:xfrm>
+      </p:grpSpPr>
+      <p:sp>
+        <p:nvSpPr>
+          <p:cNvPr id="2" name="Title 1">
+            <a:extLst>
+              <a:ext uri="{FF2B5EF4-FFF2-40B4-BE49-F238E27FC236}">
+                <a16:creationId xmlns:a16="http://schemas.microsoft.com/office/drawing/2014/main" id="{86A6687E-1398-4E2F-B2E5-752A4515DCAD}"/>
+              </a:ext>
+            </a:extLst>
+          </p:cNvPr>
+          <p:cNvSpPr>
+            <a:spLocks noGrp="1"/>
+          </p:cNvSpPr>
+          <p:nvPr>
+            <p:ph type="title"/>
+          </p:nvPr>
+        </p:nvSpPr>
+        <p:spPr/>
+        <p:txBody>
+          <a:bodyPr>
+            <a:normAutofit/>
+          </a:bodyPr>
+          <a:lstStyle/>
+          <a:p>
+            <a:r>
+              <a:rPr lang="en-US" dirty="0"/>
+              <a:t>Example 2.1: </a:t>
+            </a:r>
+            <a:r>
+              <a:rPr lang="en-US" dirty="0" err="1"/>
+              <a:t>Nonsampling</a:t>
+            </a:r>
+            <a:r>
+              <a:rPr lang="en-US" dirty="0"/>
+              <a:t> Concerns </a:t>
+            </a:r>
+            <a:r>
+              <a:rPr lang="en-US" sz="2000" b="0" dirty="0"/>
+              <a:t>(2 of 2)</a:t>
+            </a:r>
+            <a:endParaRPr lang="en-US" dirty="0"/>
+          </a:p>
+        </p:txBody>
+      </p:sp>
+      <p:sp>
+        <p:nvSpPr>
+          <p:cNvPr id="3" name="Content Placeholder 2">
+            <a:extLst>
+              <a:ext uri="{FF2B5EF4-FFF2-40B4-BE49-F238E27FC236}">
+                <a16:creationId xmlns:a16="http://schemas.microsoft.com/office/drawing/2014/main" id="{F560478D-FD83-4675-BAAB-76846DAF7B63}"/>
+              </a:ext>
+            </a:extLst>
+          </p:cNvPr>
+          <p:cNvSpPr>
+            <a:spLocks noGrp="1"/>
+          </p:cNvSpPr>
+          <p:nvPr>
+            <p:ph sz="quarter" idx="12"/>
+          </p:nvPr>
+        </p:nvSpPr>
+        <p:spPr>
+          <a:xfrm>
+            <a:off x="1828800" y="1889722"/>
+            <a:ext cx="8534400" cy="4369023"/>
+          </a:xfrm>
+          <a:prstGeom prst="rect">
+            <a:avLst/>
+          </a:prstGeom>
+        </p:spPr>
+        <p:txBody>
+          <a:bodyPr/>
+          <a:lstStyle/>
+          <a:p>
+            <a:pPr marL="292608" indent="-292608">
+              <a:buClr>
+                <a:schemeClr val="accent2"/>
+              </a:buClr>
+              <a:buFont typeface="Arial" panose="020B0604020202020204" pitchFamily="34" charset="0"/>
+              <a:buChar char="•"/>
+            </a:pPr>
+            <a:r>
+              <a:rPr lang="en-US" dirty="0"/>
+              <a:t>In addition to carefully selecting the sample, you need to guard against other possible sources of bias as well.</a:t>
+            </a:r>
+          </a:p>
+          <a:p>
+            <a:pPr marL="292608" indent="-292608">
+              <a:buClr>
+                <a:schemeClr val="accent2"/>
+              </a:buClr>
+              <a:buFont typeface="Arial" panose="020B0604020202020204" pitchFamily="34" charset="0"/>
+              <a:buChar char="•"/>
+            </a:pPr>
+            <a:r>
+              <a:rPr lang="en-US" dirty="0"/>
+              <a:t>For example, when talking to people, their memories and truthfulness can impact their answers.</a:t>
+            </a:r>
+          </a:p>
+          <a:p>
+            <a:pPr marL="292608" indent="-292608">
+              <a:buClr>
+                <a:schemeClr val="accent2"/>
+              </a:buClr>
+              <a:buFont typeface="Arial" panose="020B0604020202020204" pitchFamily="34" charset="0"/>
+              <a:buChar char="•"/>
+            </a:pPr>
+            <a:r>
+              <a:rPr lang="en-US" dirty="0"/>
+              <a:t>Other examples of </a:t>
+            </a:r>
+            <a:r>
+              <a:rPr lang="en-US" dirty="0" err="1"/>
+              <a:t>nonsampling</a:t>
+            </a:r>
+            <a:r>
+              <a:rPr lang="en-US" dirty="0"/>
+              <a:t> concerns include: </a:t>
+            </a:r>
+          </a:p>
+          <a:p>
+            <a:pPr marL="914400" lvl="2" indent="-457200">
+              <a:spcBef>
+                <a:spcPts val="1000"/>
+              </a:spcBef>
+              <a:buClr>
+                <a:schemeClr val="accent2"/>
+              </a:buClr>
+              <a:buFont typeface="Courier New" panose="02070309020205020404" pitchFamily="49" charset="0"/>
+              <a:buChar char="o"/>
+            </a:pPr>
+            <a:r>
+              <a:rPr lang="en-US" sz="2400" dirty="0"/>
+              <a:t>The effects that the wording of a question can have on responses</a:t>
+            </a:r>
+          </a:p>
+          <a:p>
+            <a:pPr marL="914400" lvl="2" indent="-457200">
+              <a:spcBef>
+                <a:spcPts val="1000"/>
+              </a:spcBef>
+              <a:buClr>
+                <a:schemeClr val="accent2"/>
+              </a:buClr>
+              <a:buFont typeface="Courier New" panose="02070309020205020404" pitchFamily="49" charset="0"/>
+              <a:buChar char="o"/>
+            </a:pPr>
+            <a:r>
+              <a:rPr lang="en-US" sz="2400" dirty="0"/>
+              <a:t>The effects that interviewers can have by virtue of their demeanor, sex, race and other characteristics</a:t>
+            </a:r>
+          </a:p>
+          <a:p>
+            <a:pPr marL="914400" lvl="2" indent="-457200">
+              <a:spcBef>
+                <a:spcPts val="1000"/>
+              </a:spcBef>
+              <a:buClr>
+                <a:schemeClr val="accent2"/>
+              </a:buClr>
+              <a:buFont typeface="Courier New" panose="02070309020205020404" pitchFamily="49" charset="0"/>
+              <a:buChar char="o"/>
+            </a:pPr>
+            <a:r>
+              <a:rPr lang="en-US" sz="2400" dirty="0"/>
+              <a:t>Using an </a:t>
+            </a:r>
+            <a:r>
+              <a:rPr lang="en-US" sz="2400" dirty="0" err="1"/>
+              <a:t>uncalibrated</a:t>
+            </a:r>
+            <a:r>
+              <a:rPr lang="en-US" sz="2400" dirty="0"/>
+              <a:t> scale, etc.</a:t>
+            </a:r>
+          </a:p>
+        </p:txBody>
+      </p:sp>
+    </p:spTree>
+    <p:extLst>
+      <p:ext uri="{BB962C8B-B14F-4D97-AF65-F5344CB8AC3E}">
+        <p14:creationId xmlns:p14="http://schemas.microsoft.com/office/powerpoint/2010/main" val="3554617179"/>
+      </p:ext>
+    </p:extLst>
+  </p:cSld>
+  <p:clrMapOvr>
+    <a:masterClrMapping/>
+  </p:clrMapOvr>
+</p:sld>
+</file>
+
+<file path=ppt/slides/slide33.xml><?xml version="1.0" encoding="utf-8"?>
+<p:sld xmlns:a="http://schemas.openxmlformats.org/drawingml/2006/main" xmlns:r="http://schemas.openxmlformats.org/officeDocument/2006/relationships" xmlns:p="http://schemas.openxmlformats.org/presentationml/2006/main">
+  <p:cSld>
+    <p:spTree>
+      <p:nvGrpSpPr>
+        <p:cNvPr id="1" name=""/>
+        <p:cNvGrpSpPr/>
+        <p:nvPr/>
+      </p:nvGrpSpPr>
+      <p:grpSpPr>
+        <a:xfrm>
+          <a:off x="0" y="0"/>
+          <a:ext cx="0" cy="0"/>
+          <a:chOff x="0" y="0"/>
+          <a:chExt cx="0" cy="0"/>
+        </a:xfrm>
+      </p:grpSpPr>
+      <p:sp>
+        <p:nvSpPr>
+          <p:cNvPr id="2" name="Title 1">
+            <a:extLst>
+              <a:ext uri="{FF2B5EF4-FFF2-40B4-BE49-F238E27FC236}">
+                <a16:creationId xmlns:a16="http://schemas.microsoft.com/office/drawing/2014/main" id="{1B063A8F-2C05-9068-DDCB-9FA1E2F82B89}"/>
+              </a:ext>
+            </a:extLst>
+          </p:cNvPr>
+          <p:cNvSpPr>
+            <a:spLocks noGrp="1"/>
+          </p:cNvSpPr>
+          <p:nvPr>
+            <p:ph type="title"/>
+          </p:nvPr>
+        </p:nvSpPr>
+        <p:spPr/>
+        <p:txBody>
+          <a:bodyPr/>
+          <a:lstStyle/>
+          <a:p>
+            <a:r>
+              <a:rPr lang="en-US" dirty="0"/>
+              <a:t>Cool-Down #1</a:t>
+            </a:r>
+          </a:p>
+        </p:txBody>
+      </p:sp>
+      <p:sp>
+        <p:nvSpPr>
+          <p:cNvPr id="3" name="Footer Placeholder 2">
+            <a:extLst>
+              <a:ext uri="{FF2B5EF4-FFF2-40B4-BE49-F238E27FC236}">
+                <a16:creationId xmlns:a16="http://schemas.microsoft.com/office/drawing/2014/main" id="{39A76AB8-4370-6C23-9C4A-7DBCDD27BB6D}"/>
+              </a:ext>
+            </a:extLst>
+          </p:cNvPr>
+          <p:cNvSpPr>
+            <a:spLocks noGrp="1"/>
+          </p:cNvSpPr>
+          <p:nvPr>
+            <p:ph type="ftr" sz="quarter" idx="11"/>
+          </p:nvPr>
+        </p:nvSpPr>
+        <p:spPr/>
+        <p:txBody>
+          <a:bodyPr/>
+          <a:lstStyle/>
+          <a:p>
+            <a:r>
+              <a:rPr lang="en-US"/>
+              <a:t>Copyright ©2020 John Wiley &amp; Sons, Inc. </a:t>
+            </a:r>
+            <a:endParaRPr lang="en-US" dirty="0"/>
+          </a:p>
+        </p:txBody>
+      </p:sp>
+      <mc:AlternateContent xmlns:mc="http://schemas.openxmlformats.org/markup-compatibility/2006">
+        <mc:Choice xmlns:a14="http://schemas.microsoft.com/office/drawing/2010/main" Requires="a14">
+          <p:sp>
+            <p:nvSpPr>
+              <p:cNvPr id="4" name="Content Placeholder 3">
+                <a:extLst>
+                  <a:ext uri="{FF2B5EF4-FFF2-40B4-BE49-F238E27FC236}">
+                    <a16:creationId xmlns:a16="http://schemas.microsoft.com/office/drawing/2014/main" id="{BC4ADBDF-C4EB-B623-EABF-8921572E52D2}"/>
+                  </a:ext>
+                </a:extLst>
+              </p:cNvPr>
+              <p:cNvSpPr>
+                <a:spLocks noGrp="1"/>
+              </p:cNvSpPr>
+              <p:nvPr>
+                <p:ph sz="quarter" idx="12"/>
+              </p:nvPr>
+            </p:nvSpPr>
+            <p:spPr/>
+            <p:txBody>
+              <a:bodyPr/>
+              <a:lstStyle/>
+              <a:p>
+                <a:r>
+                  <a:rPr lang="en-US" dirty="0"/>
+                  <a:t>1.5.1: Which long-run proportion of success, </a:t>
+                </a:r>
+                <a14:m>
+                  <m:oMath xmlns:m="http://schemas.openxmlformats.org/officeDocument/2006/math">
+                    <m:r>
+                      <a:rPr lang="en-US" i="1" dirty="0" smtClean="0">
+                        <a:latin typeface="Cambria Math" panose="02040503050406030204" pitchFamily="18" charset="0"/>
+                      </a:rPr>
+                      <m:t>𝜋</m:t>
+                    </m:r>
+                  </m:oMath>
+                </a14:m>
+                <a:r>
+                  <a:rPr lang="en-US" dirty="0"/>
+                  <a:t>, gives the largest standard deviation of the null distribution when the sample size is 10?</a:t>
+                </a:r>
+              </a:p>
+              <a:p>
+                <a:pPr lvl="1"/>
+                <a:r>
+                  <a:rPr lang="en-US" dirty="0"/>
+                  <a:t>A. 0.05		B. 0.25		C. 0.50		D. 0.90</a:t>
+                </a:r>
+              </a:p>
+              <a:p>
+                <a:pPr lvl="1"/>
+                <a:endParaRPr lang="en-US" dirty="0"/>
+              </a:p>
+              <a:p>
+                <a:endParaRPr lang="en-US" dirty="0"/>
+              </a:p>
+            </p:txBody>
+          </p:sp>
+        </mc:Choice>
+        <mc:Fallback>
+          <p:sp>
+            <p:nvSpPr>
+              <p:cNvPr id="4" name="Content Placeholder 3">
+                <a:extLst>
+                  <a:ext uri="{FF2B5EF4-FFF2-40B4-BE49-F238E27FC236}">
+                    <a16:creationId xmlns:a16="http://schemas.microsoft.com/office/drawing/2014/main" id="{BC4ADBDF-C4EB-B623-EABF-8921572E52D2}"/>
+                  </a:ext>
+                </a:extLst>
+              </p:cNvPr>
+              <p:cNvSpPr>
+                <a:spLocks noGrp="1" noRot="1" noChangeAspect="1" noMove="1" noResize="1" noEditPoints="1" noAdjustHandles="1" noChangeArrowheads="1" noChangeShapeType="1" noTextEdit="1"/>
+              </p:cNvSpPr>
+              <p:nvPr>
+                <p:ph sz="quarter" idx="12"/>
+              </p:nvPr>
+            </p:nvSpPr>
+            <p:spPr>
+              <a:blipFill>
+                <a:blip r:embed="rId2"/>
+                <a:stretch>
+                  <a:fillRect l="-893" t="-1603"/>
+                </a:stretch>
+              </a:blipFill>
+            </p:spPr>
+            <p:txBody>
+              <a:bodyPr/>
+              <a:lstStyle/>
+              <a:p>
+                <a:r>
+                  <a:rPr lang="en-US">
+                    <a:noFill/>
+                  </a:rPr>
+                  <a:t> </a:t>
+                </a:r>
+              </a:p>
+            </p:txBody>
+          </p:sp>
+        </mc:Fallback>
+      </mc:AlternateContent>
+    </p:spTree>
+    <p:extLst>
+      <p:ext uri="{BB962C8B-B14F-4D97-AF65-F5344CB8AC3E}">
+        <p14:creationId xmlns:p14="http://schemas.microsoft.com/office/powerpoint/2010/main" val="1383516525"/>
+      </p:ext>
+    </p:extLst>
+  </p:cSld>
+  <p:clrMapOvr>
+    <a:masterClrMapping/>
+  </p:clrMapOvr>
+</p:sld>
+</file>
+
+<file path=ppt/slides/slide34.xml><?xml version="1.0" encoding="utf-8"?>
+<p:sld xmlns:a="http://schemas.openxmlformats.org/drawingml/2006/main" xmlns:r="http://schemas.openxmlformats.org/officeDocument/2006/relationships" xmlns:p="http://schemas.openxmlformats.org/presentationml/2006/main">
+  <p:cSld>
+    <p:spTree>
+      <p:nvGrpSpPr>
+        <p:cNvPr id="1" name=""/>
+        <p:cNvGrpSpPr/>
+        <p:nvPr/>
+      </p:nvGrpSpPr>
+      <p:grpSpPr>
+        <a:xfrm>
+          <a:off x="0" y="0"/>
+          <a:ext cx="0" cy="0"/>
+          <a:chOff x="0" y="0"/>
+          <a:chExt cx="0" cy="0"/>
+        </a:xfrm>
+      </p:grpSpPr>
+      <p:sp>
+        <p:nvSpPr>
+          <p:cNvPr id="2" name="Title 1">
+            <a:extLst>
+              <a:ext uri="{FF2B5EF4-FFF2-40B4-BE49-F238E27FC236}">
+                <a16:creationId xmlns:a16="http://schemas.microsoft.com/office/drawing/2014/main" id="{1D44FA24-59AC-7BF6-72CD-A674BFF6E1F2}"/>
+              </a:ext>
+            </a:extLst>
+          </p:cNvPr>
+          <p:cNvSpPr>
+            <a:spLocks noGrp="1"/>
+          </p:cNvSpPr>
+          <p:nvPr>
+            <p:ph type="title"/>
+          </p:nvPr>
+        </p:nvSpPr>
+        <p:spPr/>
+        <p:txBody>
+          <a:bodyPr/>
+          <a:lstStyle/>
+          <a:p>
+            <a:r>
+              <a:rPr lang="en-US" dirty="0"/>
+              <a:t>Cool-Down #2</a:t>
+            </a:r>
+          </a:p>
+        </p:txBody>
+      </p:sp>
+      <p:sp>
+        <p:nvSpPr>
+          <p:cNvPr id="3" name="Footer Placeholder 2">
+            <a:extLst>
+              <a:ext uri="{FF2B5EF4-FFF2-40B4-BE49-F238E27FC236}">
+                <a16:creationId xmlns:a16="http://schemas.microsoft.com/office/drawing/2014/main" id="{FBE1301E-296C-13CC-AB9D-1FB632DEC5E0}"/>
+              </a:ext>
+            </a:extLst>
+          </p:cNvPr>
+          <p:cNvSpPr>
+            <a:spLocks noGrp="1"/>
+          </p:cNvSpPr>
+          <p:nvPr>
+            <p:ph type="ftr" sz="quarter" idx="11"/>
+          </p:nvPr>
+        </p:nvSpPr>
+        <p:spPr/>
+        <p:txBody>
+          <a:bodyPr/>
+          <a:lstStyle/>
+          <a:p>
+            <a:r>
+              <a:rPr lang="en-US"/>
+              <a:t>Copyright ©2020 John Wiley &amp; Sons, Inc. </a:t>
+            </a:r>
+            <a:endParaRPr lang="en-US" dirty="0"/>
+          </a:p>
+        </p:txBody>
+      </p:sp>
+      <mc:AlternateContent xmlns:mc="http://schemas.openxmlformats.org/markup-compatibility/2006">
+        <mc:Choice xmlns:a14="http://schemas.microsoft.com/office/drawing/2010/main" Requires="a14">
+          <p:sp>
+            <p:nvSpPr>
+              <p:cNvPr id="4" name="Content Placeholder 3">
+                <a:extLst>
+                  <a:ext uri="{FF2B5EF4-FFF2-40B4-BE49-F238E27FC236}">
+                    <a16:creationId xmlns:a16="http://schemas.microsoft.com/office/drawing/2014/main" id="{9851C9CD-ADC8-288B-FEB3-9781C5B7CCB1}"/>
+                  </a:ext>
+                </a:extLst>
+              </p:cNvPr>
+              <p:cNvSpPr>
+                <a:spLocks noGrp="1"/>
+              </p:cNvSpPr>
+              <p:nvPr>
+                <p:ph sz="quarter" idx="12"/>
+              </p:nvPr>
+            </p:nvSpPr>
+            <p:spPr/>
+            <p:txBody>
+              <a:bodyPr/>
+              <a:lstStyle/>
+              <a:p>
+                <a:r>
+                  <a:rPr lang="en-US" dirty="0"/>
+                  <a:t>1.4.5: According to the National Coffee Drinking Study from the National Coffee Association, 40% of 18-24 year-olds in the USA regularly drink coffee every day. Suppose this number is accurate. In a sample of 140 students at Hope College, we found that 63 of them (45%) drink coffee regularly. We want to test </a:t>
+                </a:r>
+                <a:r>
+                  <a:rPr lang="en-US" dirty="0" err="1"/>
+                  <a:t>whetehr</a:t>
+                </a:r>
+                <a:r>
+                  <a:rPr lang="en-US" dirty="0"/>
+                  <a:t> the daily coffee-drinking habits of students at Hope College differ from the 40% claim for the nation. Which of A-E is the appropriate sample statistic and proper symbol?</a:t>
+                </a:r>
+              </a:p>
+              <a:p>
+                <a:r>
+                  <a:rPr lang="en-US" dirty="0"/>
+                  <a:t>A. </a:t>
+                </a:r>
+                <a14:m>
+                  <m:oMath xmlns:m="http://schemas.openxmlformats.org/officeDocument/2006/math">
+                    <m:acc>
+                      <m:accPr>
+                        <m:chr m:val="̂"/>
+                        <m:ctrlPr>
+                          <a:rPr lang="en-US" i="1" dirty="0" smtClean="0">
+                            <a:latin typeface="Cambria Math" panose="02040503050406030204" pitchFamily="18" charset="0"/>
+                          </a:rPr>
+                        </m:ctrlPr>
+                      </m:accPr>
+                      <m:e>
+                        <m:r>
+                          <a:rPr lang="en-US" i="1" dirty="0" smtClean="0">
+                            <a:latin typeface="Cambria Math" panose="02040503050406030204" pitchFamily="18" charset="0"/>
+                          </a:rPr>
+                          <m:t>𝑝</m:t>
+                        </m:r>
+                      </m:e>
+                    </m:acc>
+                    <m:r>
+                      <a:rPr lang="en-US" i="1" dirty="0" smtClean="0">
+                        <a:latin typeface="Cambria Math" panose="02040503050406030204" pitchFamily="18" charset="0"/>
+                      </a:rPr>
+                      <m:t>=0.40</m:t>
+                    </m:r>
+                  </m:oMath>
+                </a14:m>
+                <a:r>
+                  <a:rPr lang="en-US" dirty="0"/>
+                  <a:t>		B. </a:t>
+                </a:r>
+                <a14:m>
+                  <m:oMath xmlns:m="http://schemas.openxmlformats.org/officeDocument/2006/math">
+                    <m:r>
+                      <a:rPr lang="en-US" i="1" dirty="0" smtClean="0">
+                        <a:latin typeface="Cambria Math" panose="02040503050406030204" pitchFamily="18" charset="0"/>
+                      </a:rPr>
+                      <m:t>𝜋</m:t>
+                    </m:r>
+                    <m:r>
+                      <a:rPr lang="en-US" i="1" dirty="0" smtClean="0">
+                        <a:latin typeface="Cambria Math" panose="02040503050406030204" pitchFamily="18" charset="0"/>
+                      </a:rPr>
+                      <m:t>= 0.40</m:t>
+                    </m:r>
+                  </m:oMath>
+                </a14:m>
+                <a:r>
+                  <a:rPr lang="en-US" dirty="0"/>
+                  <a:t>		C. </a:t>
+                </a:r>
+                <a14:m>
+                  <m:oMath xmlns:m="http://schemas.openxmlformats.org/officeDocument/2006/math">
+                    <m:r>
+                      <a:rPr lang="en-US" i="1" dirty="0" smtClean="0">
+                        <a:latin typeface="Cambria Math" panose="02040503050406030204" pitchFamily="18" charset="0"/>
+                      </a:rPr>
+                      <m:t>𝜋</m:t>
+                    </m:r>
+                    <m:r>
+                      <a:rPr lang="en-US" i="1" dirty="0" smtClean="0">
+                        <a:latin typeface="Cambria Math" panose="02040503050406030204" pitchFamily="18" charset="0"/>
+                      </a:rPr>
+                      <m:t>=0.45</m:t>
+                    </m:r>
+                  </m:oMath>
+                </a14:m>
+                <a:r>
+                  <a:rPr lang="en-US" dirty="0"/>
+                  <a:t>		D. </a:t>
+                </a:r>
+                <a14:m>
+                  <m:oMath xmlns:m="http://schemas.openxmlformats.org/officeDocument/2006/math">
+                    <m:r>
+                      <a:rPr lang="en-US" i="1" dirty="0" smtClean="0">
+                        <a:latin typeface="Cambria Math" panose="02040503050406030204" pitchFamily="18" charset="0"/>
+                      </a:rPr>
+                      <m:t>𝑛</m:t>
+                    </m:r>
+                    <m:r>
+                      <a:rPr lang="en-US" i="1" dirty="0" smtClean="0">
+                        <a:latin typeface="Cambria Math" panose="02040503050406030204" pitchFamily="18" charset="0"/>
+                      </a:rPr>
+                      <m:t> = 140</m:t>
+                    </m:r>
+                  </m:oMath>
+                </a14:m>
+                <a:endParaRPr lang="en-US" dirty="0"/>
+              </a:p>
+            </p:txBody>
+          </p:sp>
+        </mc:Choice>
+        <mc:Fallback>
+          <p:sp>
+            <p:nvSpPr>
+              <p:cNvPr id="4" name="Content Placeholder 3">
+                <a:extLst>
+                  <a:ext uri="{FF2B5EF4-FFF2-40B4-BE49-F238E27FC236}">
+                    <a16:creationId xmlns:a16="http://schemas.microsoft.com/office/drawing/2014/main" id="{9851C9CD-ADC8-288B-FEB3-9781C5B7CCB1}"/>
+                  </a:ext>
+                </a:extLst>
+              </p:cNvPr>
+              <p:cNvSpPr>
+                <a:spLocks noGrp="1" noRot="1" noChangeAspect="1" noMove="1" noResize="1" noEditPoints="1" noAdjustHandles="1" noChangeArrowheads="1" noChangeShapeType="1" noTextEdit="1"/>
+              </p:cNvSpPr>
+              <p:nvPr>
+                <p:ph sz="quarter" idx="12"/>
+              </p:nvPr>
+            </p:nvSpPr>
+            <p:spPr>
+              <a:blipFill>
+                <a:blip r:embed="rId2"/>
+                <a:stretch>
+                  <a:fillRect l="-893" t="-1603" r="-1451"/>
+                </a:stretch>
+              </a:blipFill>
+            </p:spPr>
+            <p:txBody>
+              <a:bodyPr/>
+              <a:lstStyle/>
+              <a:p>
+                <a:r>
+                  <a:rPr lang="en-US">
+                    <a:noFill/>
+                  </a:rPr>
+                  <a:t> </a:t>
+                </a:r>
+              </a:p>
+            </p:txBody>
+          </p:sp>
+        </mc:Fallback>
+      </mc:AlternateContent>
+    </p:spTree>
+    <p:extLst>
+      <p:ext uri="{BB962C8B-B14F-4D97-AF65-F5344CB8AC3E}">
+        <p14:creationId xmlns:p14="http://schemas.microsoft.com/office/powerpoint/2010/main" val="3283431301"/>
+      </p:ext>
+    </p:extLst>
+  </p:cSld>
+  <p:clrMapOvr>
+    <a:masterClrMapping/>
+  </p:clrMapOvr>
+</p:sld>
+</file>
+
+<file path=ppt/slides/slide35.xml><?xml version="1.0" encoding="utf-8"?>
+<p:sld xmlns:a="http://schemas.openxmlformats.org/drawingml/2006/main" xmlns:r="http://schemas.openxmlformats.org/officeDocument/2006/relationships" xmlns:p="http://schemas.openxmlformats.org/presentationml/2006/main">
+  <p:cSld>
+    <p:spTree>
+      <p:nvGrpSpPr>
+        <p:cNvPr id="1" name=""/>
+        <p:cNvGrpSpPr/>
+        <p:nvPr/>
+      </p:nvGrpSpPr>
+      <p:grpSpPr>
+        <a:xfrm>
+          <a:off x="0" y="0"/>
+          <a:ext cx="0" cy="0"/>
+          <a:chOff x="0" y="0"/>
+          <a:chExt cx="0" cy="0"/>
+        </a:xfrm>
+      </p:grpSpPr>
+      <p:sp>
+        <p:nvSpPr>
+          <p:cNvPr id="2" name="Title 1">
+            <a:extLst>
+              <a:ext uri="{FF2B5EF4-FFF2-40B4-BE49-F238E27FC236}">
+                <a16:creationId xmlns:a16="http://schemas.microsoft.com/office/drawing/2014/main" id="{AB9EE3D3-0DA0-F38F-0B13-C861030FB4D4}"/>
+              </a:ext>
+            </a:extLst>
+          </p:cNvPr>
+          <p:cNvSpPr>
+            <a:spLocks noGrp="1"/>
+          </p:cNvSpPr>
+          <p:nvPr>
+            <p:ph type="title"/>
+          </p:nvPr>
+        </p:nvSpPr>
+        <p:spPr/>
+        <p:txBody>
+          <a:bodyPr/>
+          <a:lstStyle/>
+          <a:p>
+            <a:r>
+              <a:rPr lang="en-US" dirty="0"/>
+              <a:t>Cool-Down #3</a:t>
+            </a:r>
+          </a:p>
+        </p:txBody>
+      </p:sp>
+      <p:sp>
+        <p:nvSpPr>
+          <p:cNvPr id="3" name="Footer Placeholder 2">
+            <a:extLst>
+              <a:ext uri="{FF2B5EF4-FFF2-40B4-BE49-F238E27FC236}">
+                <a16:creationId xmlns:a16="http://schemas.microsoft.com/office/drawing/2014/main" id="{AF445D38-C15E-5A16-8976-50B933855437}"/>
+              </a:ext>
+            </a:extLst>
+          </p:cNvPr>
+          <p:cNvSpPr>
+            <a:spLocks noGrp="1"/>
+          </p:cNvSpPr>
+          <p:nvPr>
+            <p:ph type="ftr" sz="quarter" idx="11"/>
+          </p:nvPr>
+        </p:nvSpPr>
+        <p:spPr/>
+        <p:txBody>
+          <a:bodyPr/>
+          <a:lstStyle/>
+          <a:p>
+            <a:r>
+              <a:rPr lang="en-US"/>
+              <a:t>Copyright ©2020 John Wiley &amp; Sons, Inc. </a:t>
+            </a:r>
+            <a:endParaRPr lang="en-US" dirty="0"/>
+          </a:p>
+        </p:txBody>
+      </p:sp>
+      <p:sp>
+        <p:nvSpPr>
+          <p:cNvPr id="4" name="Content Placeholder 3">
+            <a:extLst>
+              <a:ext uri="{FF2B5EF4-FFF2-40B4-BE49-F238E27FC236}">
+                <a16:creationId xmlns:a16="http://schemas.microsoft.com/office/drawing/2014/main" id="{9C43D840-1603-9838-7C95-570117B83BBE}"/>
+              </a:ext>
+            </a:extLst>
+          </p:cNvPr>
+          <p:cNvSpPr>
+            <a:spLocks noGrp="1"/>
+          </p:cNvSpPr>
+          <p:nvPr>
+            <p:ph sz="quarter" idx="12"/>
+          </p:nvPr>
+        </p:nvSpPr>
+        <p:spPr/>
+        <p:txBody>
+          <a:bodyPr/>
+          <a:lstStyle/>
+          <a:p>
+            <a:r>
+              <a:rPr lang="en-US" dirty="0"/>
+              <a:t>2.1.8: The administration at a local high school is considering building a new gym. In order to find out how the student body feels about this, a student organization decides to conduct a survey of the students. Which of the sampling methods in A-D is a simple random sample from all the students at the school?</a:t>
+            </a:r>
+          </a:p>
+          <a:p>
+            <a:pPr lvl="1"/>
+            <a:r>
+              <a:rPr lang="en-US" dirty="0"/>
+              <a:t>A. Survey random students who are leaving after school sports practices.</a:t>
+            </a:r>
+          </a:p>
+          <a:p>
+            <a:pPr lvl="1"/>
+            <a:r>
+              <a:rPr lang="en-US" dirty="0"/>
+              <a:t>B. Randomly select 40 students in each grade level and survey the selected students.</a:t>
+            </a:r>
+          </a:p>
+          <a:p>
+            <a:pPr lvl="1"/>
+            <a:r>
+              <a:rPr lang="en-US" dirty="0"/>
+              <a:t>C. Randomly select two homeroom classes from the 50 homeroom classes at the school and survey all students from those two classes.</a:t>
+            </a:r>
+          </a:p>
+          <a:p>
+            <a:pPr lvl="1"/>
+            <a:r>
+              <a:rPr lang="en-US" dirty="0"/>
+              <a:t>D. Obtain a list of all students attending the high school, randomly select students from the list, and survey the students selected.</a:t>
+            </a:r>
+          </a:p>
+        </p:txBody>
+      </p:sp>
+    </p:spTree>
+    <p:extLst>
+      <p:ext uri="{BB962C8B-B14F-4D97-AF65-F5344CB8AC3E}">
+        <p14:creationId xmlns:p14="http://schemas.microsoft.com/office/powerpoint/2010/main" val="2067006074"/>
+      </p:ext>
+    </p:extLst>
+  </p:cSld>
+  <p:clrMapOvr>
+    <a:masterClrMapping/>
+  </p:clrMapOvr>
+</p:sld>
+</file>
+
+<file path=ppt/slides/slide4.xml><?xml version="1.0" encoding="utf-8"?>
+<p:sld xmlns:a="http://schemas.openxmlformats.org/drawingml/2006/main" xmlns:r="http://schemas.openxmlformats.org/officeDocument/2006/relationships" xmlns:p="http://schemas.openxmlformats.org/presentationml/2006/main">
+  <p:cSld>
+    <p:spTree>
+      <p:nvGrpSpPr>
+        <p:cNvPr id="1" name=""/>
+        <p:cNvGrpSpPr/>
+        <p:nvPr/>
+      </p:nvGrpSpPr>
+      <p:grpSpPr>
+        <a:xfrm>
+          <a:off x="0" y="0"/>
+          <a:ext cx="0" cy="0"/>
+          <a:chOff x="0" y="0"/>
+          <a:chExt cx="0" cy="0"/>
+        </a:xfrm>
+      </p:grpSpPr>
+      <p:sp>
+        <p:nvSpPr>
           <p:cNvPr id="13" name="Title 12">
             <a:extLst>
               <a:ext uri="{FF2B5EF4-FFF2-40B4-BE49-F238E27FC236}">
@@ -22529,7 +23937,7 @@
             <a:fld id="{67B19427-F580-D146-B60E-4CADEE75497F}" type="slidenum">
               <a:rPr lang="en-US" smtClean="0"/>
               <a:pPr/>
-              <a:t>3</a:t>
+              <a:t>4</a:t>
             </a:fld>
             <a:endParaRPr lang="en-US" dirty="0"/>
           </a:p>
@@ -23051,561 +24459,6 @@
 </p:sld>
 </file>
 
-<file path=ppt/slides/slide30.xml><?xml version="1.0" encoding="utf-8"?>
-<p:sld xmlns:a="http://schemas.openxmlformats.org/drawingml/2006/main" xmlns:r="http://schemas.openxmlformats.org/officeDocument/2006/relationships" xmlns:p="http://schemas.openxmlformats.org/presentationml/2006/main">
-  <p:cSld>
-    <p:spTree>
-      <p:nvGrpSpPr>
-        <p:cNvPr id="1" name=""/>
-        <p:cNvGrpSpPr/>
-        <p:nvPr/>
-      </p:nvGrpSpPr>
-      <p:grpSpPr>
-        <a:xfrm>
-          <a:off x="0" y="0"/>
-          <a:ext cx="0" cy="0"/>
-          <a:chOff x="0" y="0"/>
-          <a:chExt cx="0" cy="0"/>
-        </a:xfrm>
-      </p:grpSpPr>
-      <p:sp>
-        <p:nvSpPr>
-          <p:cNvPr id="2" name="Title 1">
-            <a:extLst>
-              <a:ext uri="{FF2B5EF4-FFF2-40B4-BE49-F238E27FC236}">
-                <a16:creationId xmlns:a16="http://schemas.microsoft.com/office/drawing/2014/main" id="{86A6687E-1398-4E2F-B2E5-752A4515DCAD}"/>
-              </a:ext>
-            </a:extLst>
-          </p:cNvPr>
-          <p:cNvSpPr>
-            <a:spLocks noGrp="1"/>
-          </p:cNvSpPr>
-          <p:nvPr>
-            <p:ph type="title"/>
-          </p:nvPr>
-        </p:nvSpPr>
-        <p:spPr/>
-        <p:txBody>
-          <a:bodyPr>
-            <a:normAutofit/>
-          </a:bodyPr>
-          <a:lstStyle/>
-          <a:p>
-            <a:r>
-              <a:rPr lang="en-US" dirty="0"/>
-              <a:t>Example 2.1: </a:t>
-            </a:r>
-            <a:r>
-              <a:rPr lang="en-US" dirty="0" err="1"/>
-              <a:t>Nonsampling</a:t>
-            </a:r>
-            <a:r>
-              <a:rPr lang="en-US" dirty="0"/>
-              <a:t> Concerns </a:t>
-            </a:r>
-            <a:r>
-              <a:rPr lang="en-US" sz="2000" b="0" dirty="0"/>
-              <a:t>(1 of 2)</a:t>
-            </a:r>
-            <a:endParaRPr lang="en-US" dirty="0"/>
-          </a:p>
-        </p:txBody>
-      </p:sp>
-      <p:sp>
-        <p:nvSpPr>
-          <p:cNvPr id="3" name="Content Placeholder 2">
-            <a:extLst>
-              <a:ext uri="{FF2B5EF4-FFF2-40B4-BE49-F238E27FC236}">
-                <a16:creationId xmlns:a16="http://schemas.microsoft.com/office/drawing/2014/main" id="{F560478D-FD83-4675-BAAB-76846DAF7B63}"/>
-              </a:ext>
-            </a:extLst>
-          </p:cNvPr>
-          <p:cNvSpPr>
-            <a:spLocks noGrp="1"/>
-          </p:cNvSpPr>
-          <p:nvPr>
-            <p:ph sz="quarter" idx="12"/>
-          </p:nvPr>
-        </p:nvSpPr>
-        <p:spPr>
-          <a:prstGeom prst="rect">
-            <a:avLst/>
-          </a:prstGeom>
-        </p:spPr>
-        <p:txBody>
-          <a:bodyPr/>
-          <a:lstStyle/>
-          <a:p>
-            <a:pPr marL="292608" indent="-292608">
-              <a:buClr>
-                <a:schemeClr val="accent2"/>
-              </a:buClr>
-              <a:buFont typeface="Arial" panose="020B0604020202020204" pitchFamily="34" charset="0"/>
-              <a:buChar char="•"/>
-            </a:pPr>
-            <a:r>
-              <a:rPr lang="en-US" dirty="0"/>
-              <a:t>When a question is posed to someone in a poll that has a </a:t>
-            </a:r>
-            <a:r>
-              <a:rPr lang="en-US" i="1" dirty="0"/>
-              <a:t>socially desirable </a:t>
-            </a:r>
-            <a:r>
-              <a:rPr lang="en-US" dirty="0"/>
-              <a:t>response (like you voted), individuals will sometimes overestimate or incorrectly recall their past behavior.</a:t>
-            </a:r>
-          </a:p>
-          <a:p>
-            <a:pPr marL="292608" indent="-292608">
-              <a:buClr>
-                <a:schemeClr val="accent2"/>
-              </a:buClr>
-              <a:buFont typeface="Arial" panose="020B0604020202020204" pitchFamily="34" charset="0"/>
-              <a:buChar char="•"/>
-            </a:pPr>
-            <a:r>
-              <a:rPr lang="en-US" dirty="0"/>
-              <a:t>In this case, we have reason to believe that the difference between 0.698 and 0.592 is not due to a badly collected sample (a “sampling concern”) or due to random chance, but rather due to individuals not being honest in their responses.</a:t>
-            </a:r>
-          </a:p>
-          <a:p>
-            <a:pPr marL="292608" indent="-292608">
-              <a:buClr>
-                <a:schemeClr val="accent2"/>
-              </a:buClr>
-              <a:buFont typeface="Arial" panose="020B0604020202020204" pitchFamily="34" charset="0"/>
-              <a:buChar char="•"/>
-            </a:pPr>
-            <a:r>
-              <a:rPr lang="en-US" dirty="0"/>
-              <a:t>This is a type of </a:t>
-            </a:r>
-            <a:r>
-              <a:rPr lang="en-US" b="1" dirty="0" err="1"/>
-              <a:t>nonsampling</a:t>
-            </a:r>
-            <a:r>
-              <a:rPr lang="en-US" b="1" dirty="0"/>
-              <a:t> concern</a:t>
-            </a:r>
-            <a:r>
-              <a:rPr lang="en-US" dirty="0"/>
-              <a:t>.</a:t>
-            </a:r>
-          </a:p>
-        </p:txBody>
-      </p:sp>
-    </p:spTree>
-    <p:extLst>
-      <p:ext uri="{BB962C8B-B14F-4D97-AF65-F5344CB8AC3E}">
-        <p14:creationId xmlns:p14="http://schemas.microsoft.com/office/powerpoint/2010/main" val="2875002151"/>
-      </p:ext>
-    </p:extLst>
-  </p:cSld>
-  <p:clrMapOvr>
-    <a:masterClrMapping/>
-  </p:clrMapOvr>
-</p:sld>
-</file>
-
-<file path=ppt/slides/slide31.xml><?xml version="1.0" encoding="utf-8"?>
-<p:sld xmlns:a="http://schemas.openxmlformats.org/drawingml/2006/main" xmlns:r="http://schemas.openxmlformats.org/officeDocument/2006/relationships" xmlns:p="http://schemas.openxmlformats.org/presentationml/2006/main">
-  <p:cSld>
-    <p:spTree>
-      <p:nvGrpSpPr>
-        <p:cNvPr id="1" name=""/>
-        <p:cNvGrpSpPr/>
-        <p:nvPr/>
-      </p:nvGrpSpPr>
-      <p:grpSpPr>
-        <a:xfrm>
-          <a:off x="0" y="0"/>
-          <a:ext cx="0" cy="0"/>
-          <a:chOff x="0" y="0"/>
-          <a:chExt cx="0" cy="0"/>
-        </a:xfrm>
-      </p:grpSpPr>
-      <p:sp>
-        <p:nvSpPr>
-          <p:cNvPr id="2" name="Title 1">
-            <a:extLst>
-              <a:ext uri="{FF2B5EF4-FFF2-40B4-BE49-F238E27FC236}">
-                <a16:creationId xmlns:a16="http://schemas.microsoft.com/office/drawing/2014/main" id="{86A6687E-1398-4E2F-B2E5-752A4515DCAD}"/>
-              </a:ext>
-            </a:extLst>
-          </p:cNvPr>
-          <p:cNvSpPr>
-            <a:spLocks noGrp="1"/>
-          </p:cNvSpPr>
-          <p:nvPr>
-            <p:ph type="title"/>
-          </p:nvPr>
-        </p:nvSpPr>
-        <p:spPr/>
-        <p:txBody>
-          <a:bodyPr>
-            <a:normAutofit/>
-          </a:bodyPr>
-          <a:lstStyle/>
-          <a:p>
-            <a:r>
-              <a:rPr lang="en-US" dirty="0"/>
-              <a:t>Example 2.1: </a:t>
-            </a:r>
-            <a:r>
-              <a:rPr lang="en-US" dirty="0" err="1"/>
-              <a:t>Nonsampling</a:t>
-            </a:r>
-            <a:r>
-              <a:rPr lang="en-US" dirty="0"/>
-              <a:t> Concerns </a:t>
-            </a:r>
-            <a:r>
-              <a:rPr lang="en-US" sz="2000" b="0" dirty="0"/>
-              <a:t>(2 of 2)</a:t>
-            </a:r>
-            <a:endParaRPr lang="en-US" dirty="0"/>
-          </a:p>
-        </p:txBody>
-      </p:sp>
-      <p:sp>
-        <p:nvSpPr>
-          <p:cNvPr id="3" name="Content Placeholder 2">
-            <a:extLst>
-              <a:ext uri="{FF2B5EF4-FFF2-40B4-BE49-F238E27FC236}">
-                <a16:creationId xmlns:a16="http://schemas.microsoft.com/office/drawing/2014/main" id="{F560478D-FD83-4675-BAAB-76846DAF7B63}"/>
-              </a:ext>
-            </a:extLst>
-          </p:cNvPr>
-          <p:cNvSpPr>
-            <a:spLocks noGrp="1"/>
-          </p:cNvSpPr>
-          <p:nvPr>
-            <p:ph sz="quarter" idx="12"/>
-          </p:nvPr>
-        </p:nvSpPr>
-        <p:spPr>
-          <a:xfrm>
-            <a:off x="1828800" y="1889722"/>
-            <a:ext cx="8534400" cy="4369023"/>
-          </a:xfrm>
-          <a:prstGeom prst="rect">
-            <a:avLst/>
-          </a:prstGeom>
-        </p:spPr>
-        <p:txBody>
-          <a:bodyPr/>
-          <a:lstStyle/>
-          <a:p>
-            <a:pPr marL="292608" indent="-292608">
-              <a:buClr>
-                <a:schemeClr val="accent2"/>
-              </a:buClr>
-              <a:buFont typeface="Arial" panose="020B0604020202020204" pitchFamily="34" charset="0"/>
-              <a:buChar char="•"/>
-            </a:pPr>
-            <a:r>
-              <a:rPr lang="en-US" dirty="0"/>
-              <a:t>In addition to carefully selecting the sample, you need to guard against other possible sources of bias as well.</a:t>
-            </a:r>
-          </a:p>
-          <a:p>
-            <a:pPr marL="292608" indent="-292608">
-              <a:buClr>
-                <a:schemeClr val="accent2"/>
-              </a:buClr>
-              <a:buFont typeface="Arial" panose="020B0604020202020204" pitchFamily="34" charset="0"/>
-              <a:buChar char="•"/>
-            </a:pPr>
-            <a:r>
-              <a:rPr lang="en-US" dirty="0"/>
-              <a:t>For example, when talking to people, their memories and truthfulness can impact their answers.</a:t>
-            </a:r>
-          </a:p>
-          <a:p>
-            <a:pPr marL="292608" indent="-292608">
-              <a:buClr>
-                <a:schemeClr val="accent2"/>
-              </a:buClr>
-              <a:buFont typeface="Arial" panose="020B0604020202020204" pitchFamily="34" charset="0"/>
-              <a:buChar char="•"/>
-            </a:pPr>
-            <a:r>
-              <a:rPr lang="en-US" dirty="0"/>
-              <a:t>Other examples of </a:t>
-            </a:r>
-            <a:r>
-              <a:rPr lang="en-US" dirty="0" err="1"/>
-              <a:t>nonsampling</a:t>
-            </a:r>
-            <a:r>
-              <a:rPr lang="en-US" dirty="0"/>
-              <a:t> concerns include: </a:t>
-            </a:r>
-          </a:p>
-          <a:p>
-            <a:pPr marL="914400" lvl="2" indent="-457200">
-              <a:spcBef>
-                <a:spcPts val="1000"/>
-              </a:spcBef>
-              <a:buClr>
-                <a:schemeClr val="accent2"/>
-              </a:buClr>
-              <a:buFont typeface="Courier New" panose="02070309020205020404" pitchFamily="49" charset="0"/>
-              <a:buChar char="o"/>
-            </a:pPr>
-            <a:r>
-              <a:rPr lang="en-US" sz="2400" dirty="0"/>
-              <a:t>The effects that the wording of a question can have on responses</a:t>
-            </a:r>
-          </a:p>
-          <a:p>
-            <a:pPr marL="914400" lvl="2" indent="-457200">
-              <a:spcBef>
-                <a:spcPts val="1000"/>
-              </a:spcBef>
-              <a:buClr>
-                <a:schemeClr val="accent2"/>
-              </a:buClr>
-              <a:buFont typeface="Courier New" panose="02070309020205020404" pitchFamily="49" charset="0"/>
-              <a:buChar char="o"/>
-            </a:pPr>
-            <a:r>
-              <a:rPr lang="en-US" sz="2400" dirty="0"/>
-              <a:t>The effects that interviewers can have by virtue of their demeanor, sex, race and other characteristics</a:t>
-            </a:r>
-          </a:p>
-          <a:p>
-            <a:pPr marL="914400" lvl="2" indent="-457200">
-              <a:spcBef>
-                <a:spcPts val="1000"/>
-              </a:spcBef>
-              <a:buClr>
-                <a:schemeClr val="accent2"/>
-              </a:buClr>
-              <a:buFont typeface="Courier New" panose="02070309020205020404" pitchFamily="49" charset="0"/>
-              <a:buChar char="o"/>
-            </a:pPr>
-            <a:r>
-              <a:rPr lang="en-US" sz="2400" dirty="0"/>
-              <a:t>Using an </a:t>
-            </a:r>
-            <a:r>
-              <a:rPr lang="en-US" sz="2400" dirty="0" err="1"/>
-              <a:t>uncalibrated</a:t>
-            </a:r>
-            <a:r>
-              <a:rPr lang="en-US" sz="2400" dirty="0"/>
-              <a:t> scale, etc.</a:t>
-            </a:r>
-          </a:p>
-        </p:txBody>
-      </p:sp>
-    </p:spTree>
-    <p:extLst>
-      <p:ext uri="{BB962C8B-B14F-4D97-AF65-F5344CB8AC3E}">
-        <p14:creationId xmlns:p14="http://schemas.microsoft.com/office/powerpoint/2010/main" val="3554617179"/>
-      </p:ext>
-    </p:extLst>
-  </p:cSld>
-  <p:clrMapOvr>
-    <a:masterClrMapping/>
-  </p:clrMapOvr>
-</p:sld>
-</file>
-
-<file path=ppt/slides/slide4.xml><?xml version="1.0" encoding="utf-8"?>
-<p:sld xmlns:a="http://schemas.openxmlformats.org/drawingml/2006/main" xmlns:r="http://schemas.openxmlformats.org/officeDocument/2006/relationships" xmlns:p="http://schemas.openxmlformats.org/presentationml/2006/main">
-  <p:cSld>
-    <p:spTree>
-      <p:nvGrpSpPr>
-        <p:cNvPr id="1" name=""/>
-        <p:cNvGrpSpPr/>
-        <p:nvPr/>
-      </p:nvGrpSpPr>
-      <p:grpSpPr>
-        <a:xfrm>
-          <a:off x="0" y="0"/>
-          <a:ext cx="0" cy="0"/>
-          <a:chOff x="0" y="0"/>
-          <a:chExt cx="0" cy="0"/>
-        </a:xfrm>
-      </p:grpSpPr>
-      <p:sp>
-        <p:nvSpPr>
-          <p:cNvPr id="2" name="Title 1">
-            <a:extLst>
-              <a:ext uri="{FF2B5EF4-FFF2-40B4-BE49-F238E27FC236}">
-                <a16:creationId xmlns:a16="http://schemas.microsoft.com/office/drawing/2014/main" id="{776425A1-2F10-484F-80D3-D1DF42971302}"/>
-              </a:ext>
-            </a:extLst>
-          </p:cNvPr>
-          <p:cNvSpPr>
-            <a:spLocks noGrp="1"/>
-          </p:cNvSpPr>
-          <p:nvPr>
-            <p:ph type="title"/>
-          </p:nvPr>
-        </p:nvSpPr>
-        <p:spPr/>
-        <p:txBody>
-          <a:bodyPr/>
-          <a:lstStyle/>
-          <a:p>
-            <a:r>
-              <a:rPr lang="en-US" dirty="0"/>
-              <a:t>Generalization</a:t>
-            </a:r>
-          </a:p>
-        </p:txBody>
-      </p:sp>
-      <p:sp>
-        <p:nvSpPr>
-          <p:cNvPr id="3" name="Content Placeholder 2">
-            <a:extLst>
-              <a:ext uri="{FF2B5EF4-FFF2-40B4-BE49-F238E27FC236}">
-                <a16:creationId xmlns:a16="http://schemas.microsoft.com/office/drawing/2014/main" id="{733F55E6-2348-4292-9183-420364689E97}"/>
-              </a:ext>
-            </a:extLst>
-          </p:cNvPr>
-          <p:cNvSpPr>
-            <a:spLocks noGrp="1"/>
-          </p:cNvSpPr>
-          <p:nvPr>
-            <p:ph sz="quarter" idx="12"/>
-          </p:nvPr>
-        </p:nvSpPr>
-        <p:spPr>
-          <a:prstGeom prst="rect">
-            <a:avLst/>
-          </a:prstGeom>
-        </p:spPr>
-        <p:txBody>
-          <a:bodyPr/>
-          <a:lstStyle/>
-          <a:p>
-            <a:pPr marL="292608" indent="-292608">
-              <a:buClr>
-                <a:schemeClr val="accent2"/>
-              </a:buClr>
-              <a:buFont typeface="Arial" panose="020B0604020202020204" pitchFamily="34" charset="0"/>
-              <a:buChar char="•"/>
-            </a:pPr>
-            <a:r>
-              <a:rPr lang="en-US" sz="2400" dirty="0"/>
-              <a:t>Now we want to focus more on finite populations instead of an infinite process.</a:t>
-            </a:r>
-          </a:p>
-          <a:p>
-            <a:pPr marL="292608" indent="-292608">
-              <a:buClr>
-                <a:schemeClr val="accent2"/>
-              </a:buClr>
-              <a:buFont typeface="Arial" panose="020B0604020202020204" pitchFamily="34" charset="0"/>
-              <a:buChar char="•"/>
-            </a:pPr>
-            <a:r>
-              <a:rPr lang="en-US" sz="2400" dirty="0"/>
-              <a:t>Typically the entire population is not measured for what we are interested in and it is difficult to do so (this would be taking a </a:t>
-            </a:r>
-            <a:r>
-              <a:rPr lang="en-US" sz="2400" b="1" dirty="0"/>
-              <a:t>census</a:t>
-            </a:r>
-            <a:r>
-              <a:rPr lang="en-US" sz="2400" dirty="0"/>
-              <a:t>).</a:t>
-            </a:r>
-          </a:p>
-          <a:p>
-            <a:pPr marL="292608" indent="-292608">
-              <a:buClr>
-                <a:schemeClr val="accent2"/>
-              </a:buClr>
-              <a:buFont typeface="Arial" panose="020B0604020202020204" pitchFamily="34" charset="0"/>
-              <a:buChar char="•"/>
-            </a:pPr>
-            <a:endParaRPr lang="en-US" sz="2400" dirty="0"/>
-          </a:p>
-          <a:p>
-            <a:pPr marL="292608" indent="-292608">
-              <a:buClr>
-                <a:schemeClr val="accent2"/>
-              </a:buClr>
-              <a:buFont typeface="Arial" panose="020B0604020202020204" pitchFamily="34" charset="0"/>
-              <a:buChar char="•"/>
-            </a:pPr>
-            <a:r>
-              <a:rPr lang="en-US" sz="2400" dirty="0"/>
-              <a:t>We, therefore, take </a:t>
-            </a:r>
-            <a:r>
-              <a:rPr lang="en-US" sz="2400" b="1" dirty="0"/>
-              <a:t>samples</a:t>
-            </a:r>
-            <a:r>
-              <a:rPr lang="en-US" sz="2400" dirty="0"/>
-              <a:t> (some subgroup of the population) to give us information we want about a </a:t>
-            </a:r>
-            <a:r>
-              <a:rPr lang="en-US" sz="2400" b="1" dirty="0"/>
-              <a:t>population</a:t>
-            </a:r>
-            <a:r>
-              <a:rPr lang="en-US" sz="2400" dirty="0"/>
-              <a:t>.</a:t>
-            </a:r>
-          </a:p>
-          <a:p>
-            <a:pPr marL="292608" indent="-292608">
-              <a:buClr>
-                <a:schemeClr val="accent2"/>
-              </a:buClr>
-              <a:buFont typeface="Arial" panose="020B0604020202020204" pitchFamily="34" charset="0"/>
-              <a:buChar char="•"/>
-            </a:pPr>
-            <a:r>
-              <a:rPr lang="en-US" sz="2400" dirty="0"/>
-              <a:t>We want to </a:t>
-            </a:r>
-            <a:r>
-              <a:rPr lang="en-US" sz="2400" b="1" dirty="0"/>
-              <a:t>generalize</a:t>
-            </a:r>
-            <a:r>
-              <a:rPr lang="en-US" sz="2400" dirty="0"/>
-              <a:t> the information from the sample to the population.</a:t>
-            </a:r>
-          </a:p>
-          <a:p>
-            <a:pPr marL="292608" indent="-292608">
-              <a:buClr>
-                <a:schemeClr val="accent2"/>
-              </a:buClr>
-              <a:buFont typeface="Arial" panose="020B0604020202020204" pitchFamily="34" charset="0"/>
-              <a:buChar char="•"/>
-            </a:pPr>
-            <a:r>
-              <a:rPr lang="en-US" sz="2400" dirty="0"/>
-              <a:t>In this section, we will look at how to collect a sample that we feel is representative of the larger population.</a:t>
-            </a:r>
-          </a:p>
-        </p:txBody>
-      </p:sp>
-    </p:spTree>
-    <p:extLst>
-      <p:ext uri="{BB962C8B-B14F-4D97-AF65-F5344CB8AC3E}">
-        <p14:creationId xmlns:p14="http://schemas.microsoft.com/office/powerpoint/2010/main" val="983845878"/>
-      </p:ext>
-    </p:extLst>
-  </p:cSld>
-  <p:clrMapOvr>
-    <a:masterClrMapping/>
-  </p:clrMapOvr>
-</p:sld>
-</file>
-
 <file path=ppt/slides/slide5.xml><?xml version="1.0" encoding="utf-8"?>
 <p:sld xmlns:a="http://schemas.openxmlformats.org/drawingml/2006/main" xmlns:r="http://schemas.openxmlformats.org/officeDocument/2006/relationships" xmlns:p="http://schemas.openxmlformats.org/presentationml/2006/main">
   <p:cSld>
@@ -23628,7 +24481,7 @@
           <p:cNvPr id="2" name="Title 1">
             <a:extLst>
               <a:ext uri="{FF2B5EF4-FFF2-40B4-BE49-F238E27FC236}">
-                <a16:creationId xmlns:a16="http://schemas.microsoft.com/office/drawing/2014/main" id="{86A6687E-1398-4E2F-B2E5-752A4515DCAD}"/>
+                <a16:creationId xmlns:a16="http://schemas.microsoft.com/office/drawing/2014/main" id="{776425A1-2F10-484F-80D3-D1DF42971302}"/>
               </a:ext>
             </a:extLst>
           </p:cNvPr>
@@ -23641,14 +24494,12 @@
         </p:nvSpPr>
         <p:spPr/>
         <p:txBody>
-          <a:bodyPr>
-            <a:normAutofit/>
-          </a:bodyPr>
+          <a:bodyPr/>
           <a:lstStyle/>
           <a:p>
             <a:r>
               <a:rPr lang="en-US" dirty="0"/>
-              <a:t>Example 2.1: Voter Turnout</a:t>
+              <a:t>Generalization</a:t>
             </a:r>
           </a:p>
         </p:txBody>
@@ -23658,7 +24509,7 @@
           <p:cNvPr id="3" name="Content Placeholder 2">
             <a:extLst>
               <a:ext uri="{FF2B5EF4-FFF2-40B4-BE49-F238E27FC236}">
-                <a16:creationId xmlns:a16="http://schemas.microsoft.com/office/drawing/2014/main" id="{F560478D-FD83-4675-BAAB-76846DAF7B63}"/>
+                <a16:creationId xmlns:a16="http://schemas.microsoft.com/office/drawing/2014/main" id="{733F55E6-2348-4292-9183-420364689E97}"/>
               </a:ext>
             </a:extLst>
           </p:cNvPr>
@@ -23686,8 +24537,8 @@
               <a:buChar char="•"/>
             </a:pPr>
             <a:r>
-              <a:rPr lang="en-US" dirty="0"/>
-              <a:t>In 2018, the General Social Survey (GSS) asked if the respondent voted in the 2016 U.S. Presidential Election.</a:t>
+              <a:rPr lang="en-US" sz="2400" dirty="0"/>
+              <a:t>Now we want to focus more on finite populations instead of an infinite process.</a:t>
             </a:r>
           </a:p>
           <a:p>
@@ -23699,16 +24550,16 @@
               <a:buChar char="•"/>
             </a:pPr>
             <a:r>
-              <a:rPr lang="en-US" dirty="0"/>
-              <a:t>Of the 2,181 eligible voters surveyed, 1,523 </a:t>
-            </a:r>
-            <a:r>
-              <a:rPr lang="en-US" b="1" dirty="0"/>
-              <a:t>(69.8%) </a:t>
-            </a:r>
-            <a:r>
-              <a:rPr lang="en-US" dirty="0"/>
-              <a:t>of them said yes.</a:t>
+              <a:rPr lang="en-US" sz="2400" dirty="0"/>
+              <a:t>Typically the entire population is not measured for what we are interested in and it is difficult to do so (this would be taking a </a:t>
+            </a:r>
+            <a:r>
+              <a:rPr lang="en-US" sz="2400" b="1" dirty="0"/>
+              <a:t>census</a:t>
+            </a:r>
+            <a:r>
+              <a:rPr lang="en-US" sz="2400" dirty="0"/>
+              <a:t>).</a:t>
             </a:r>
           </a:p>
           <a:p>
@@ -23719,7 +24570,7 @@
               <a:buFont typeface="Arial" panose="020B0604020202020204" pitchFamily="34" charset="0"/>
               <a:buChar char="•"/>
             </a:pPr>
-            <a:endParaRPr lang="en-US" dirty="0"/>
+            <a:endParaRPr lang="en-US" sz="2400" dirty="0"/>
           </a:p>
           <a:p>
             <a:pPr marL="292608" indent="-292608">
@@ -23730,16 +24581,24 @@
               <a:buChar char="•"/>
             </a:pPr>
             <a:r>
-              <a:rPr lang="en-US" dirty="0"/>
-              <a:t>But the United States Election Project said there were 230,931,921 citizens eligible to vote in that election and only 136,753,936 </a:t>
-            </a:r>
-            <a:r>
-              <a:rPr lang="en-US" b="1" dirty="0"/>
-              <a:t>(59.2%) </a:t>
-            </a:r>
-            <a:r>
-              <a:rPr lang="en-US" dirty="0"/>
-              <a:t>of them voted.</a:t>
+              <a:rPr lang="en-US" sz="2400" dirty="0"/>
+              <a:t>We, therefore, take </a:t>
+            </a:r>
+            <a:r>
+              <a:rPr lang="en-US" sz="2400" b="1" dirty="0"/>
+              <a:t>samples</a:t>
+            </a:r>
+            <a:r>
+              <a:rPr lang="en-US" sz="2400" dirty="0"/>
+              <a:t> (some subgroup of the population) to give us information we want about a </a:t>
+            </a:r>
+            <a:r>
+              <a:rPr lang="en-US" sz="2400" b="1" dirty="0"/>
+              <a:t>population</a:t>
+            </a:r>
+            <a:r>
+              <a:rPr lang="en-US" sz="2400" dirty="0"/>
+              <a:t>.</a:t>
             </a:r>
           </a:p>
           <a:p>
@@ -23751,8 +24610,29 @@
               <a:buChar char="•"/>
             </a:pPr>
             <a:r>
-              <a:rPr lang="en-US" dirty="0"/>
-              <a:t>Why aren’t these two percentages that represent voter turnout the same?</a:t>
+              <a:rPr lang="en-US" sz="2400" dirty="0"/>
+              <a:t>We want to </a:t>
+            </a:r>
+            <a:r>
+              <a:rPr lang="en-US" sz="2400" b="1" dirty="0"/>
+              <a:t>generalize</a:t>
+            </a:r>
+            <a:r>
+              <a:rPr lang="en-US" sz="2400" dirty="0"/>
+              <a:t> the information from the sample to the population.</a:t>
+            </a:r>
+          </a:p>
+          <a:p>
+            <a:pPr marL="292608" indent="-292608">
+              <a:buClr>
+                <a:schemeClr val="accent2"/>
+              </a:buClr>
+              <a:buFont typeface="Arial" panose="020B0604020202020204" pitchFamily="34" charset="0"/>
+              <a:buChar char="•"/>
+            </a:pPr>
+            <a:r>
+              <a:rPr lang="en-US" sz="2400" dirty="0"/>
+              <a:t>In this section, we will look at how to collect a sample that we feel is representative of the larger population.</a:t>
             </a:r>
           </a:p>
         </p:txBody>
@@ -23760,7 +24640,7 @@
     </p:spTree>
     <p:extLst>
       <p:ext uri="{BB962C8B-B14F-4D97-AF65-F5344CB8AC3E}">
-        <p14:creationId xmlns:p14="http://schemas.microsoft.com/office/powerpoint/2010/main" val="4141507713"/>
+        <p14:creationId xmlns:p14="http://schemas.microsoft.com/office/powerpoint/2010/main" val="983845878"/>
       </p:ext>
     </p:extLst>
   </p:cSld>
@@ -23812,7 +24692,7 @@
           <a:p>
             <a:r>
               <a:rPr lang="en-US" dirty="0"/>
-              <a:t>Example 2.1: Population and Sample</a:t>
+              <a:t>Example 2.1: Voter Turnout</a:t>
             </a:r>
           </a:p>
         </p:txBody>
@@ -23851,6 +24731,170 @@
             </a:pPr>
             <a:r>
               <a:rPr lang="en-US" dirty="0"/>
+              <a:t>In 2018, the General Social Survey (GSS) asked if the respondent voted in the 2016 U.S. Presidential Election.</a:t>
+            </a:r>
+          </a:p>
+          <a:p>
+            <a:pPr marL="292608" indent="-292608">
+              <a:buClr>
+                <a:schemeClr val="accent2"/>
+              </a:buClr>
+              <a:buFont typeface="Arial" panose="020B0604020202020204" pitchFamily="34" charset="0"/>
+              <a:buChar char="•"/>
+            </a:pPr>
+            <a:r>
+              <a:rPr lang="en-US" dirty="0"/>
+              <a:t>Of the 2,181 eligible voters surveyed, 1,523 </a:t>
+            </a:r>
+            <a:r>
+              <a:rPr lang="en-US" b="1" dirty="0"/>
+              <a:t>(69.8%) </a:t>
+            </a:r>
+            <a:r>
+              <a:rPr lang="en-US" dirty="0"/>
+              <a:t>of them said yes.</a:t>
+            </a:r>
+          </a:p>
+          <a:p>
+            <a:pPr marL="292608" indent="-292608">
+              <a:buClr>
+                <a:schemeClr val="accent2"/>
+              </a:buClr>
+              <a:buFont typeface="Arial" panose="020B0604020202020204" pitchFamily="34" charset="0"/>
+              <a:buChar char="•"/>
+            </a:pPr>
+            <a:endParaRPr lang="en-US" dirty="0"/>
+          </a:p>
+          <a:p>
+            <a:pPr marL="292608" indent="-292608">
+              <a:buClr>
+                <a:schemeClr val="accent2"/>
+              </a:buClr>
+              <a:buFont typeface="Arial" panose="020B0604020202020204" pitchFamily="34" charset="0"/>
+              <a:buChar char="•"/>
+            </a:pPr>
+            <a:r>
+              <a:rPr lang="en-US" dirty="0"/>
+              <a:t>But the United States Election Project said there were 230,931,921 citizens eligible to vote in that election and only 136,753,936 </a:t>
+            </a:r>
+            <a:r>
+              <a:rPr lang="en-US" b="1" dirty="0"/>
+              <a:t>(59.2%) </a:t>
+            </a:r>
+            <a:r>
+              <a:rPr lang="en-US" dirty="0"/>
+              <a:t>of them voted.</a:t>
+            </a:r>
+          </a:p>
+          <a:p>
+            <a:pPr marL="292608" indent="-292608">
+              <a:buClr>
+                <a:schemeClr val="accent2"/>
+              </a:buClr>
+              <a:buFont typeface="Arial" panose="020B0604020202020204" pitchFamily="34" charset="0"/>
+              <a:buChar char="•"/>
+            </a:pPr>
+            <a:r>
+              <a:rPr lang="en-US" dirty="0"/>
+              <a:t>Why aren’t these two percentages that represent voter turnout the same?</a:t>
+            </a:r>
+          </a:p>
+        </p:txBody>
+      </p:sp>
+    </p:spTree>
+    <p:extLst>
+      <p:ext uri="{BB962C8B-B14F-4D97-AF65-F5344CB8AC3E}">
+        <p14:creationId xmlns:p14="http://schemas.microsoft.com/office/powerpoint/2010/main" val="4141507713"/>
+      </p:ext>
+    </p:extLst>
+  </p:cSld>
+  <p:clrMapOvr>
+    <a:masterClrMapping/>
+  </p:clrMapOvr>
+</p:sld>
+</file>
+
+<file path=ppt/slides/slide7.xml><?xml version="1.0" encoding="utf-8"?>
+<p:sld xmlns:a="http://schemas.openxmlformats.org/drawingml/2006/main" xmlns:r="http://schemas.openxmlformats.org/officeDocument/2006/relationships" xmlns:p="http://schemas.openxmlformats.org/presentationml/2006/main">
+  <p:cSld>
+    <p:spTree>
+      <p:nvGrpSpPr>
+        <p:cNvPr id="1" name=""/>
+        <p:cNvGrpSpPr/>
+        <p:nvPr/>
+      </p:nvGrpSpPr>
+      <p:grpSpPr>
+        <a:xfrm>
+          <a:off x="0" y="0"/>
+          <a:ext cx="0" cy="0"/>
+          <a:chOff x="0" y="0"/>
+          <a:chExt cx="0" cy="0"/>
+        </a:xfrm>
+      </p:grpSpPr>
+      <p:sp>
+        <p:nvSpPr>
+          <p:cNvPr id="2" name="Title 1">
+            <a:extLst>
+              <a:ext uri="{FF2B5EF4-FFF2-40B4-BE49-F238E27FC236}">
+                <a16:creationId xmlns:a16="http://schemas.microsoft.com/office/drawing/2014/main" id="{86A6687E-1398-4E2F-B2E5-752A4515DCAD}"/>
+              </a:ext>
+            </a:extLst>
+          </p:cNvPr>
+          <p:cNvSpPr>
+            <a:spLocks noGrp="1"/>
+          </p:cNvSpPr>
+          <p:nvPr>
+            <p:ph type="title"/>
+          </p:nvPr>
+        </p:nvSpPr>
+        <p:spPr/>
+        <p:txBody>
+          <a:bodyPr>
+            <a:normAutofit/>
+          </a:bodyPr>
+          <a:lstStyle/>
+          <a:p>
+            <a:r>
+              <a:rPr lang="en-US" dirty="0"/>
+              <a:t>Example 2.1: Population and Sample</a:t>
+            </a:r>
+          </a:p>
+        </p:txBody>
+      </p:sp>
+      <p:sp>
+        <p:nvSpPr>
+          <p:cNvPr id="3" name="Content Placeholder 2">
+            <a:extLst>
+              <a:ext uri="{FF2B5EF4-FFF2-40B4-BE49-F238E27FC236}">
+                <a16:creationId xmlns:a16="http://schemas.microsoft.com/office/drawing/2014/main" id="{F560478D-FD83-4675-BAAB-76846DAF7B63}"/>
+              </a:ext>
+            </a:extLst>
+          </p:cNvPr>
+          <p:cNvSpPr>
+            <a:spLocks noGrp="1"/>
+          </p:cNvSpPr>
+          <p:nvPr>
+            <p:ph sz="quarter" idx="12"/>
+          </p:nvPr>
+        </p:nvSpPr>
+        <p:spPr>
+          <a:prstGeom prst="rect">
+            <a:avLst/>
+          </a:prstGeom>
+        </p:spPr>
+        <p:txBody>
+          <a:bodyPr/>
+          <a:lstStyle/>
+          <a:p>
+            <a:pPr marL="292608" indent="-292608">
+              <a:buClr>
+                <a:schemeClr val="accent2"/>
+              </a:buClr>
+              <a:buFont typeface="Arial" panose="020B0604020202020204" pitchFamily="34" charset="0"/>
+              <a:buChar char="•"/>
+            </a:pPr>
+            <a:r>
+              <a:rPr lang="en-US" dirty="0"/>
               <a:t>Perhaps the respondents to the GSS (the </a:t>
             </a:r>
             <a:r>
@@ -23927,7 +24971,7 @@
 </p:sld>
 </file>
 
-<file path=ppt/slides/slide7.xml><?xml version="1.0" encoding="utf-8"?>
+<file path=ppt/slides/slide8.xml><?xml version="1.0" encoding="utf-8"?>
 <p:sld xmlns:a="http://schemas.openxmlformats.org/drawingml/2006/main" xmlns:r="http://schemas.openxmlformats.org/officeDocument/2006/relationships" xmlns:p="http://schemas.openxmlformats.org/presentationml/2006/main">
   <p:cSld>
     <p:spTree>
@@ -24109,160 +25153,6 @@
     <p:extLst>
       <p:ext uri="{BB962C8B-B14F-4D97-AF65-F5344CB8AC3E}">
         <p14:creationId xmlns:p14="http://schemas.microsoft.com/office/powerpoint/2010/main" val="2488127308"/>
-      </p:ext>
-    </p:extLst>
-  </p:cSld>
-  <p:clrMapOvr>
-    <a:masterClrMapping/>
-  </p:clrMapOvr>
-</p:sld>
-</file>
-
-<file path=ppt/slides/slide8.xml><?xml version="1.0" encoding="utf-8"?>
-<p:sld xmlns:a="http://schemas.openxmlformats.org/drawingml/2006/main" xmlns:r="http://schemas.openxmlformats.org/officeDocument/2006/relationships" xmlns:p="http://schemas.openxmlformats.org/presentationml/2006/main">
-  <p:cSld>
-    <p:spTree>
-      <p:nvGrpSpPr>
-        <p:cNvPr id="1" name=""/>
-        <p:cNvGrpSpPr/>
-        <p:nvPr/>
-      </p:nvGrpSpPr>
-      <p:grpSpPr>
-        <a:xfrm>
-          <a:off x="0" y="0"/>
-          <a:ext cx="0" cy="0"/>
-          <a:chOff x="0" y="0"/>
-          <a:chExt cx="0" cy="0"/>
-        </a:xfrm>
-      </p:grpSpPr>
-      <p:sp>
-        <p:nvSpPr>
-          <p:cNvPr id="2" name="Title 1">
-            <a:extLst>
-              <a:ext uri="{FF2B5EF4-FFF2-40B4-BE49-F238E27FC236}">
-                <a16:creationId xmlns:a16="http://schemas.microsoft.com/office/drawing/2014/main" id="{86A6687E-1398-4E2F-B2E5-752A4515DCAD}"/>
-              </a:ext>
-            </a:extLst>
-          </p:cNvPr>
-          <p:cNvSpPr>
-            <a:spLocks noGrp="1"/>
-          </p:cNvSpPr>
-          <p:nvPr>
-            <p:ph type="title"/>
-          </p:nvPr>
-        </p:nvSpPr>
-        <p:spPr/>
-        <p:txBody>
-          <a:bodyPr>
-            <a:normAutofit/>
-          </a:bodyPr>
-          <a:lstStyle/>
-          <a:p>
-            <a:r>
-              <a:rPr lang="en-US" dirty="0"/>
-              <a:t>Example 2.1: Nonrandom Samples</a:t>
-            </a:r>
-          </a:p>
-        </p:txBody>
-      </p:sp>
-      <p:sp>
-        <p:nvSpPr>
-          <p:cNvPr id="3" name="Content Placeholder 2">
-            <a:extLst>
-              <a:ext uri="{FF2B5EF4-FFF2-40B4-BE49-F238E27FC236}">
-                <a16:creationId xmlns:a16="http://schemas.microsoft.com/office/drawing/2014/main" id="{F560478D-FD83-4675-BAAB-76846DAF7B63}"/>
-              </a:ext>
-            </a:extLst>
-          </p:cNvPr>
-          <p:cNvSpPr>
-            <a:spLocks noGrp="1"/>
-          </p:cNvSpPr>
-          <p:nvPr>
-            <p:ph sz="quarter" idx="12"/>
-          </p:nvPr>
-        </p:nvSpPr>
-        <p:spPr>
-          <a:prstGeom prst="rect">
-            <a:avLst/>
-          </a:prstGeom>
-        </p:spPr>
-        <p:txBody>
-          <a:bodyPr/>
-          <a:lstStyle/>
-          <a:p>
-            <a:pPr marL="292608" indent="-292608">
-              <a:buClr>
-                <a:schemeClr val="accent2"/>
-              </a:buClr>
-              <a:buFont typeface="Arial" panose="020B0604020202020204" pitchFamily="34" charset="0"/>
-              <a:buChar char="•"/>
-            </a:pPr>
-            <a:r>
-              <a:rPr lang="en-US" dirty="0"/>
-              <a:t>We wouldn’t want to do a call-in survey, where only the proudest Americans replied.</a:t>
-            </a:r>
-          </a:p>
-          <a:p>
-            <a:pPr marL="292608" indent="-292608">
-              <a:buClr>
-                <a:schemeClr val="accent2"/>
-              </a:buClr>
-              <a:buFont typeface="Arial" panose="020B0604020202020204" pitchFamily="34" charset="0"/>
-              <a:buChar char="•"/>
-            </a:pPr>
-            <a:r>
-              <a:rPr lang="en-US" dirty="0"/>
-              <a:t>Or just sample from some convenient areas of the country.</a:t>
-            </a:r>
-          </a:p>
-          <a:p>
-            <a:pPr marL="292608" indent="-292608">
-              <a:buClr>
-                <a:schemeClr val="accent2"/>
-              </a:buClr>
-              <a:buFont typeface="Arial" panose="020B0604020202020204" pitchFamily="34" charset="0"/>
-              <a:buChar char="•"/>
-            </a:pPr>
-            <a:r>
-              <a:rPr lang="en-US" dirty="0"/>
-              <a:t>A </a:t>
-            </a:r>
-            <a:r>
-              <a:rPr lang="en-US" b="1" dirty="0"/>
-              <a:t>convenience sample </a:t>
-            </a:r>
-            <a:r>
-              <a:rPr lang="en-US" dirty="0"/>
-              <a:t>is a nonrandom sample of a population. </a:t>
-            </a:r>
-            <a:r>
-              <a:rPr lang="en-US" b="1" dirty="0"/>
-              <a:t>Voluntary response</a:t>
-            </a:r>
-            <a:r>
-              <a:rPr lang="en-US" dirty="0"/>
-              <a:t>, like a phone-in or mail-in survey, is a common type of convenience sample.</a:t>
-            </a:r>
-          </a:p>
-          <a:p>
-            <a:pPr marL="292608" indent="-292608">
-              <a:buClr>
-                <a:schemeClr val="accent2"/>
-              </a:buClr>
-              <a:buFont typeface="Arial" panose="020B0604020202020204" pitchFamily="34" charset="0"/>
-              <a:buChar char="•"/>
-            </a:pPr>
-            <a:r>
-              <a:rPr lang="en-US" dirty="0"/>
-              <a:t>Convenience samples often over sample certain segments of the population that can result in over or under-estimating the true population parameter.</a:t>
-            </a:r>
-          </a:p>
-        </p:txBody>
-      </p:sp>
-    </p:spTree>
-    <p:extLst>
-      <p:ext uri="{BB962C8B-B14F-4D97-AF65-F5344CB8AC3E}">
-        <p14:creationId xmlns:p14="http://schemas.microsoft.com/office/powerpoint/2010/main" val="3617469931"/>
       </p:ext>
     </p:extLst>
   </p:cSld>
@@ -24314,7 +25204,7 @@
           <a:p>
             <a:r>
               <a:rPr lang="en-US" dirty="0"/>
-              <a:t>Example 2.1: Biased Sampling Method</a:t>
+              <a:t>Example 2.1: Nonrandom Samples</a:t>
             </a:r>
           </a:p>
         </p:txBody>
@@ -24353,15 +25243,7 @@
             </a:pPr>
             <a:r>
               <a:rPr lang="en-US" dirty="0"/>
-              <a:t>A sampling method is </a:t>
-            </a:r>
-            <a:r>
-              <a:rPr lang="en-US" b="1" dirty="0"/>
-              <a:t>biased</a:t>
-            </a:r>
-            <a:r>
-              <a:rPr lang="en-US" dirty="0"/>
-              <a:t> if statistics from samples consistently over or under-estimate the population parameter.</a:t>
+              <a:t>We wouldn’t want to do a call-in survey, where only the proudest Americans replied.</a:t>
             </a:r>
           </a:p>
           <a:p>
@@ -24374,7 +25256,7 @@
             </a:pPr>
             <a:r>
               <a:rPr lang="en-US" dirty="0"/>
-              <a:t>Bias is a property of a sampling method, not the sample.</a:t>
+              <a:t>Or just sample from some convenient areas of the country.</a:t>
             </a:r>
           </a:p>
           <a:p>
@@ -24390,12 +25272,33 @@
               <a:t>A </a:t>
             </a:r>
             <a:r>
-              <a:rPr lang="en-US" i="1" dirty="0"/>
-              <a:t>method</a:t>
+              <a:rPr lang="en-US" b="1" dirty="0"/>
+              <a:t>convenience sample </a:t>
             </a:r>
             <a:r>
               <a:rPr lang="en-US" dirty="0"/>
-              <a:t> must consistently produce non-representative results to be considered biased.</a:t>
+              <a:t>is a nonrandom sample of a population. </a:t>
+            </a:r>
+            <a:r>
+              <a:rPr lang="en-US" b="1" dirty="0"/>
+              <a:t>Voluntary response</a:t>
+            </a:r>
+            <a:r>
+              <a:rPr lang="en-US" dirty="0"/>
+              <a:t>, like a phone-in or mail-in survey, is a common type of convenience sample.</a:t>
+            </a:r>
+          </a:p>
+          <a:p>
+            <a:pPr marL="292608" indent="-292608">
+              <a:buClr>
+                <a:schemeClr val="accent2"/>
+              </a:buClr>
+              <a:buFont typeface="Arial" panose="020B0604020202020204" pitchFamily="34" charset="0"/>
+              <a:buChar char="•"/>
+            </a:pPr>
+            <a:r>
+              <a:rPr lang="en-US" dirty="0"/>
+              <a:t>Convenience samples often over sample certain segments of the population that can result in over or under-estimating the true population parameter.</a:t>
             </a:r>
           </a:p>
         </p:txBody>
@@ -24403,193 +25306,13 @@
     </p:spTree>
     <p:extLst>
       <p:ext uri="{BB962C8B-B14F-4D97-AF65-F5344CB8AC3E}">
-        <p14:creationId xmlns:p14="http://schemas.microsoft.com/office/powerpoint/2010/main" val="2412327701"/>
+        <p14:creationId xmlns:p14="http://schemas.microsoft.com/office/powerpoint/2010/main" val="3617469931"/>
       </p:ext>
     </p:extLst>
   </p:cSld>
   <p:clrMapOvr>
     <a:masterClrMapping/>
   </p:clrMapOvr>
-  <p:timing>
-    <p:tnLst>
-      <p:par>
-        <p:cTn id="1" dur="indefinite" restart="never" nodeType="tmRoot">
-          <p:childTnLst>
-            <p:seq concurrent="1" nextAc="seek">
-              <p:cTn id="2" dur="indefinite" nodeType="mainSeq">
-                <p:childTnLst>
-                  <p:par>
-                    <p:cTn id="3" fill="hold">
-                      <p:stCondLst>
-                        <p:cond delay="indefinite"/>
-                      </p:stCondLst>
-                      <p:childTnLst>
-                        <p:par>
-                          <p:cTn id="4" fill="hold">
-                            <p:stCondLst>
-                              <p:cond delay="0"/>
-                            </p:stCondLst>
-                            <p:childTnLst>
-                              <p:par>
-                                <p:cTn id="5" presetID="1" presetClass="entr" presetSubtype="0" fill="hold" grpId="0" nodeType="clickEffect">
-                                  <p:stCondLst>
-                                    <p:cond delay="0"/>
-                                  </p:stCondLst>
-                                  <p:childTnLst>
-                                    <p:set>
-                                      <p:cBhvr>
-                                        <p:cTn id="6" dur="1" fill="hold">
-                                          <p:stCondLst>
-                                            <p:cond delay="0"/>
-                                          </p:stCondLst>
-                                        </p:cTn>
-                                        <p:tgtEl>
-                                          <p:spTgt spid="3">
-                                            <p:txEl>
-                                              <p:pRg st="0" end="0"/>
-                                            </p:txEl>
-                                          </p:spTgt>
-                                        </p:tgtEl>
-                                        <p:attrNameLst>
-                                          <p:attrName>style.visibility</p:attrName>
-                                        </p:attrNameLst>
-                                      </p:cBhvr>
-                                      <p:to>
-                                        <p:strVal val="visible"/>
-                                      </p:to>
-                                    </p:set>
-                                  </p:childTnLst>
-                                </p:cTn>
-                              </p:par>
-                            </p:childTnLst>
-                          </p:cTn>
-                        </p:par>
-                      </p:childTnLst>
-                    </p:cTn>
-                  </p:par>
-                  <p:par>
-                    <p:cTn id="7" fill="hold">
-                      <p:stCondLst>
-                        <p:cond delay="indefinite"/>
-                      </p:stCondLst>
-                      <p:childTnLst>
-                        <p:par>
-                          <p:cTn id="8" fill="hold">
-                            <p:stCondLst>
-                              <p:cond delay="0"/>
-                            </p:stCondLst>
-                            <p:childTnLst>
-                              <p:par>
-                                <p:cTn id="9" presetID="1" presetClass="entr" presetSubtype="0" fill="hold" grpId="0" nodeType="clickEffect">
-                                  <p:stCondLst>
-                                    <p:cond delay="0"/>
-                                  </p:stCondLst>
-                                  <p:childTnLst>
-                                    <p:set>
-                                      <p:cBhvr>
-                                        <p:cTn id="10" dur="1" fill="hold">
-                                          <p:stCondLst>
-                                            <p:cond delay="0"/>
-                                          </p:stCondLst>
-                                        </p:cTn>
-                                        <p:tgtEl>
-                                          <p:spTgt spid="3">
-                                            <p:txEl>
-                                              <p:pRg st="1" end="1"/>
-                                            </p:txEl>
-                                          </p:spTgt>
-                                        </p:tgtEl>
-                                        <p:attrNameLst>
-                                          <p:attrName>style.visibility</p:attrName>
-                                        </p:attrNameLst>
-                                      </p:cBhvr>
-                                      <p:to>
-                                        <p:strVal val="visible"/>
-                                      </p:to>
-                                    </p:set>
-                                  </p:childTnLst>
-                                </p:cTn>
-                              </p:par>
-                            </p:childTnLst>
-                          </p:cTn>
-                        </p:par>
-                      </p:childTnLst>
-                    </p:cTn>
-                  </p:par>
-                  <p:par>
-                    <p:cTn id="11" fill="hold">
-                      <p:stCondLst>
-                        <p:cond delay="indefinite"/>
-                      </p:stCondLst>
-                      <p:childTnLst>
-                        <p:par>
-                          <p:cTn id="12" fill="hold">
-                            <p:stCondLst>
-                              <p:cond delay="0"/>
-                            </p:stCondLst>
-                            <p:childTnLst>
-                              <p:par>
-                                <p:cTn id="13" presetID="1" presetClass="entr" presetSubtype="0" fill="hold" grpId="0" nodeType="clickEffect">
-                                  <p:stCondLst>
-                                    <p:cond delay="0"/>
-                                  </p:stCondLst>
-                                  <p:childTnLst>
-                                    <p:set>
-                                      <p:cBhvr>
-                                        <p:cTn id="14" dur="1" fill="hold">
-                                          <p:stCondLst>
-                                            <p:cond delay="0"/>
-                                          </p:stCondLst>
-                                        </p:cTn>
-                                        <p:tgtEl>
-                                          <p:spTgt spid="3">
-                                            <p:txEl>
-                                              <p:pRg st="2" end="2"/>
-                                            </p:txEl>
-                                          </p:spTgt>
-                                        </p:tgtEl>
-                                        <p:attrNameLst>
-                                          <p:attrName>style.visibility</p:attrName>
-                                        </p:attrNameLst>
-                                      </p:cBhvr>
-                                      <p:to>
-                                        <p:strVal val="visible"/>
-                                      </p:to>
-                                    </p:set>
-                                  </p:childTnLst>
-                                </p:cTn>
-                              </p:par>
-                            </p:childTnLst>
-                          </p:cTn>
-                        </p:par>
-                      </p:childTnLst>
-                    </p:cTn>
-                  </p:par>
-                </p:childTnLst>
-              </p:cTn>
-              <p:prevCondLst>
-                <p:cond evt="onPrev" delay="0">
-                  <p:tgtEl>
-                    <p:sldTgt/>
-                  </p:tgtEl>
-                </p:cond>
-              </p:prevCondLst>
-              <p:nextCondLst>
-                <p:cond evt="onNext" delay="0">
-                  <p:tgtEl>
-                    <p:sldTgt/>
-                  </p:tgtEl>
-                </p:cond>
-              </p:nextCondLst>
-            </p:seq>
-          </p:childTnLst>
-        </p:cTn>
-      </p:par>
-    </p:tnLst>
-    <p:bldLst>
-      <p:bldP spid="3" grpId="0" build="p"/>
-    </p:bldLst>
-  </p:timing>
 </p:sld>
 </file>
 
